--- a/CareAuth_ROCm_Prototype_Presentation.pptx
+++ b/CareAuth_ROCm_Prototype_Presentation.pptx
@@ -17,6 +17,8 @@
     <p:sldId id="265" r:id="rId17"/>
     <p:sldId id="266" r:id="rId18"/>
     <p:sldId id="267" r:id="rId19"/>
+    <p:sldId id="268" r:id="rId20"/>
+    <p:sldId id="269" r:id="rId21"/>
   </p:sldIdLst>
   <p:sldSz cx="12191695" cy="6858000" type="screen4x3"/>
   <p:notesSz cx="6858000" cy="9144000"/>
@@ -583,7 +585,7 @@
           <a:lstStyle/>
           <a:p>
             <a:r>
-              <a:t>The return on investment is immediate. We cut review time from 45 minutes down to 11.4 seconds—a 98.6% reduction. For a typical 10-physician clinic, this recovers $182,000 in lost productivity and prevents 74% of initial denials.</a:t>
+              <a:t>Health equity was a core design goal. Instead of terrifying patients with cold medical jargon, CareAuth translates every adjudication into plain 6th-grade English, Spanish, and Hindi, empowering patients to understand their treatment plan.</a:t>
             </a:r>
           </a:p>
         </p:txBody>
@@ -653,7 +655,7 @@
           <a:lstStyle/>
           <a:p>
             <a:r>
-              <a:t>Phase 1 is fully built and working today. Phase 2 connects CareAuth directly into Epic and Cerner via FHIR APIs, and Phase 3 expands our autonomous agents into oncology, cardiology, and predictive denial management.</a:t>
+              <a:t>Why AMD? In healthcare AI, memory capacity is king. Patient charts and insurance guidelines are massive. With the AMD Instinct MI300X's 192GB of HBM3 memory, we avoid lossy chunking entirely, achieving 86 tokens per second.</a:t>
             </a:r>
           </a:p>
         </p:txBody>
@@ -723,6 +725,146 @@
           <a:lstStyle/>
           <a:p>
             <a:r>
+              <a:t>The return on investment is immediate. We cut review time from 45 minutes down to 11.4 seconds—a 98.6% reduction. For a typical 10-physician clinic, this recovers $182,000 in lost productivity and prevents 74% of initial denials.</a:t>
+            </a:r>
+          </a:p>
+        </p:txBody>
+      </p:sp>
+      <p:sp>
+        <p:nvSpPr>
+          <p:cNvPr id="4" name="Slide Number Placeholder 3"/>
+          <p:cNvSpPr>
+            <a:spLocks noGrp="1"/>
+          </p:cNvSpPr>
+          <p:nvPr>
+            <p:ph type="sldNum" idx="5" sz="quarter"/>
+          </p:nvPr>
+        </p:nvSpPr>
+        <p:spPr/>
+      </p:sp>
+    </p:spTree>
+  </p:cSld>
+  <p:clrMapOvr>
+    <a:masterClrMapping/>
+  </p:clrMapOvr>
+</p:notes>
+</file>
+
+<file path=ppt/notesSlides/notesSlide13.xml><?xml version="1.0" encoding="utf-8"?>
+<p:notes xmlns:a="http://schemas.openxmlformats.org/drawingml/2006/main" xmlns:p="http://schemas.openxmlformats.org/presentationml/2006/main" xmlns:r="http://schemas.openxmlformats.org/officeDocument/2006/relationships">
+  <p:cSld>
+    <p:spTree>
+      <p:nvGrpSpPr>
+        <p:cNvPr id="1" name=""/>
+        <p:cNvGrpSpPr/>
+        <p:nvPr/>
+      </p:nvGrpSpPr>
+      <p:grpSpPr>
+        <a:xfrm>
+          <a:off x="0" y="0"/>
+          <a:ext cx="0" cy="0"/>
+          <a:chOff x="0" y="0"/>
+          <a:chExt cx="0" cy="0"/>
+        </a:xfrm>
+      </p:grpSpPr>
+      <p:sp>
+        <p:nvSpPr>
+          <p:cNvPr id="2" name="Slide Image Placeholder 1"/>
+          <p:cNvSpPr>
+            <a:spLocks noGrp="1"/>
+          </p:cNvSpPr>
+          <p:nvPr>
+            <p:ph type="sldImg" idx="2"/>
+          </p:nvPr>
+        </p:nvSpPr>
+        <p:spPr/>
+      </p:sp>
+      <p:sp>
+        <p:nvSpPr>
+          <p:cNvPr id="3" name="Notes Placeholder 2"/>
+          <p:cNvSpPr>
+            <a:spLocks noGrp="1"/>
+          </p:cNvSpPr>
+          <p:nvPr>
+            <p:ph type="body" idx="3" sz="quarter"/>
+          </p:nvPr>
+        </p:nvSpPr>
+        <p:spPr/>
+        <p:txBody>
+          <a:bodyPr/>
+          <a:lstStyle/>
+          <a:p>
+            <a:r>
+              <a:t>Phase 1 is fully built and working today. Phase 2 connects CareAuth directly into Epic and Cerner via FHIR APIs, and Phase 3 expands our autonomous agents into oncology, cardiology, and predictive denial management.</a:t>
+            </a:r>
+          </a:p>
+        </p:txBody>
+      </p:sp>
+      <p:sp>
+        <p:nvSpPr>
+          <p:cNvPr id="4" name="Slide Number Placeholder 3"/>
+          <p:cNvSpPr>
+            <a:spLocks noGrp="1"/>
+          </p:cNvSpPr>
+          <p:nvPr>
+            <p:ph type="sldNum" idx="5" sz="quarter"/>
+          </p:nvPr>
+        </p:nvSpPr>
+        <p:spPr/>
+      </p:sp>
+    </p:spTree>
+  </p:cSld>
+  <p:clrMapOvr>
+    <a:masterClrMapping/>
+  </p:clrMapOvr>
+</p:notes>
+</file>
+
+<file path=ppt/notesSlides/notesSlide14.xml><?xml version="1.0" encoding="utf-8"?>
+<p:notes xmlns:a="http://schemas.openxmlformats.org/drawingml/2006/main" xmlns:p="http://schemas.openxmlformats.org/presentationml/2006/main" xmlns:r="http://schemas.openxmlformats.org/officeDocument/2006/relationships">
+  <p:cSld>
+    <p:spTree>
+      <p:nvGrpSpPr>
+        <p:cNvPr id="1" name=""/>
+        <p:cNvGrpSpPr/>
+        <p:nvPr/>
+      </p:nvGrpSpPr>
+      <p:grpSpPr>
+        <a:xfrm>
+          <a:off x="0" y="0"/>
+          <a:ext cx="0" cy="0"/>
+          <a:chOff x="0" y="0"/>
+          <a:chExt cx="0" cy="0"/>
+        </a:xfrm>
+      </p:grpSpPr>
+      <p:sp>
+        <p:nvSpPr>
+          <p:cNvPr id="2" name="Slide Image Placeholder 1"/>
+          <p:cNvSpPr>
+            <a:spLocks noGrp="1"/>
+          </p:cNvSpPr>
+          <p:nvPr>
+            <p:ph type="sldImg" idx="2"/>
+          </p:nvPr>
+        </p:nvSpPr>
+        <p:spPr/>
+      </p:sp>
+      <p:sp>
+        <p:nvSpPr>
+          <p:cNvPr id="3" name="Notes Placeholder 2"/>
+          <p:cNvSpPr>
+            <a:spLocks noGrp="1"/>
+          </p:cNvSpPr>
+          <p:nvPr>
+            <p:ph type="body" idx="3" sz="quarter"/>
+          </p:nvPr>
+        </p:nvSpPr>
+        <p:spPr/>
+        <p:txBody>
+          <a:bodyPr/>
+          <a:lstStyle/>
+          <a:p>
+            <a:r>
               <a:t>Judges, CareAuth-ROCm proves that autonomous agents and specialized hardware can solve healthcare's greatest administrative crisis. Built on Evolus and powered by AMD Instinct MI300X, we replace bureaucratic burnout with instant, transparent care. Thank you, and we welcome your questions!</a:t>
             </a:r>
           </a:p>
@@ -793,7 +935,7 @@
           <a:lstStyle/>
           <a:p>
             <a:r>
-              <a:t>Every physician understands this pain. In the United States, doctors spend 14 hours every single week fighting prior-authorizations. It costs $31 billion in pure waste. Why? Because insurance guidelines are 80-page legal documents and patient charts are unstructured PDFs. CareAuth-ROCm solves this at the root.</a:t>
+              <a:t>Every physician understands this pain. In the United States, doctors spend 14 hours every single week fighting prior-authorizations. It costs $31 billion in pure waste. Why? Because insurance guidelines are 80-page legal documents and patient charts are unstructured PDFs.</a:t>
             </a:r>
           </a:p>
         </p:txBody>
@@ -1073,7 +1215,7 @@
           <a:lstStyle/>
           <a:p>
             <a:r>
-              <a:t>Crucial for Track 2: We strictly enforce visible uncertainty. When evidence is incomplete—such as in step-therapy—the agent never hallucinates an approval. It drops confidence to yellow, isolates the exact missing clause, and presents an actionable remediation path for the clinic nurse.</a:t>
+              <a:t>CareAuth-ROCm is a true enterprise platform. We built complete Role-Based Access Control: Coordinators manage cases, Doctors sign off legally, Patients understand their care in their native tongue, and Lab Techs feed diagnostic scans directly.</a:t>
             </a:r>
           </a:p>
         </p:txBody>
@@ -1143,7 +1285,7 @@
           <a:lstStyle/>
           <a:p>
             <a:r>
-              <a:t>We tested CareAuth-ROCm across three end-to-end clinical scenarios: Case 1 is a clean auto-approval in 11.4 seconds. Case 2 demonstrates our visible uncertainty gate, catching a step-therapy violation in Humira. Case 3 showcases our appeal agent overturning a prior denial by finding a clinical exemption buried in a 45-page transfer chart.</a:t>
+              <a:t>Crucial for Track 2: We strictly enforce visible uncertainty. When evidence is incomplete—such as in step-therapy—the agent never hallucinates an approval. It drops confidence to yellow, isolates the exact missing clause, and presents an actionable remediation path.</a:t>
             </a:r>
           </a:p>
         </p:txBody>
@@ -1213,7 +1355,7 @@
           <a:lstStyle/>
           <a:p>
             <a:r>
-              <a:t>Health equity was a core design goal. Instead of terrifying patients with cold medical jargon, CareAuth translates every adjudication into plain 6th-grade English, Spanish, and Hindi, empowering patients to understand their treatment plan.</a:t>
+              <a:t>We tested CareAuth-ROCm across three end-to-end clinical scenarios: Case 1 is a clean auto-approval in 11.4 seconds. Case 2 demonstrates our visible uncertainty gate, catching a step-therapy violation in Humira. Case 3 showcases our appeal agent overturning a prior denial.</a:t>
             </a:r>
           </a:p>
         </p:txBody>
@@ -1283,7 +1425,7 @@
           <a:lstStyle/>
           <a:p>
             <a:r>
-              <a:t>Why AMD? In healthcare AI, memory capacity is king. Patient charts and insurance guidelines are massive. With the AMD Instinct MI300X's 192GB of HBM3 memory, we avoid lossy chunking entirely, achieving 86 tokens per second with sub-200ms initial response time.</a:t>
+              <a:t>The doctor is always in control. Our Doctor Portal gives surgeons and attending physicians a streamlined review queue. With one click, they electronically sign the CMS-1500 packet and transmit it to payer clearinghouses.</a:t>
             </a:r>
           </a:p>
         </p:txBody>
@@ -4433,7 +4575,7 @@
               <a:spcAft>
                 <a:spcPts val="1000"/>
               </a:spcAft>
-              <a:defRPr sz="2000" b="0">
+              <a:defRPr sz="2000">
                 <a:solidFill>
                   <a:srgbClr val="94A3B8"/>
                 </a:solidFill>
@@ -4441,7 +4583,7 @@
               </a:defRPr>
             </a:pPr>
             <a:r>
-              <a:t>Autonomous Clinical Prior-Authorization &amp; Payer-Policy Adjudication Agent</a:t>
+              <a:t>Autonomous Healthcare Prior-Authorization &amp; Payer-Policy Adjudication Agent</a:t>
             </a:r>
           </a:p>
           <a:p>
@@ -4781,7 +4923,7 @@
               </a:defRPr>
             </a:pPr>
             <a:r>
-              <a:t>Team Techtors  |  Live Prototype Demonstration  |  October 2026</a:t>
+              <a:t>Team Techtors  |  5-Minute Prototype Master Deck  |  October 2026</a:t>
             </a:r>
           </a:p>
         </p:txBody>
@@ -4878,7 +5020,7 @@
               </a:defRPr>
             </a:pPr>
             <a:r>
-              <a:t>BUSINESS &amp; CLINICAL VALUE  •  TRACK 2: HEALTH &amp; WELLBEING | EVOLUS ON AMD</a:t>
+              <a:t>HEALTH EQUITY &amp; ACCESSIBILITY  •  TRACK 2: HEALTH &amp; WELLBEING | EVOLUS ON AMD</a:t>
             </a:r>
           </a:p>
         </p:txBody>
@@ -4914,7 +5056,7 @@
               </a:defRPr>
             </a:pPr>
             <a:r>
-              <a:t>Measurable Impact &amp; Clinical ROI</a:t>
+              <a:t>Patient Empowerment &amp; Multilingual Health Equity</a:t>
             </a:r>
           </a:p>
         </p:txBody>
@@ -4971,7 +5113,7 @@
         <p:spPr>
           <a:xfrm>
             <a:off x="731520" y="1554480"/>
-            <a:ext cx="6858000" cy="4754880"/>
+            <a:ext cx="5266944" cy="4754880"/>
           </a:xfrm>
           <a:prstGeom prst="roundRect">
             <a:avLst/>
@@ -5016,7 +5158,7 @@
         <p:spPr>
           <a:xfrm>
             <a:off x="1005840" y="1737360"/>
-            <a:ext cx="6309360" cy="4389120"/>
+            <a:ext cx="4718304" cy="4389120"/>
           </a:xfrm>
           <a:prstGeom prst="rect">
             <a:avLst/>
@@ -5031,217 +5173,65 @@
           <a:p>
             <a:pPr>
               <a:spcAft>
-                <a:spcPts val="1000"/>
-              </a:spcAft>
-              <a:defRPr sz="1300" b="1">
-                <a:solidFill>
-                  <a:srgbClr val="06B6D4"/>
-                </a:solidFill>
-                <a:latin typeface="Segoe UI"/>
-              </a:defRPr>
-            </a:pPr>
-            <a:r>
-              <a:t>BENCHMARK: MANUAL VS. CAREAUTH-ROCM</a:t>
-            </a:r>
-          </a:p>
-          <a:p>
-            <a:pPr>
-              <a:spcAft>
-                <a:spcPts val="1200"/>
+                <a:spcPts val="600"/>
+              </a:spcAft>
+              <a:defRPr sz="1400" b="1">
+                <a:solidFill>
+                  <a:srgbClr val="ED1C24"/>
+                </a:solidFill>
+                <a:latin typeface="Segoe UI"/>
+              </a:defRPr>
+            </a:pPr>
+            <a:r>
+              <a:t>TRADITIONAL PAYER LETTERS</a:t>
+            </a:r>
+          </a:p>
+          <a:p>
+            <a:pPr>
+              <a:spcAft>
+                <a:spcPts val="1400"/>
+              </a:spcAft>
+              <a:defRPr sz="1800" b="1">
+                <a:solidFill>
+                  <a:srgbClr val="F8FAFC"/>
+                </a:solidFill>
+                <a:latin typeface="Segoe UI"/>
+              </a:defRPr>
+            </a:pPr>
+            <a:r>
+              <a:t>Confusing Jargon &amp; Patient Anxiety</a:t>
+            </a:r>
+          </a:p>
+          <a:p>
+            <a:pPr>
+              <a:spcAft>
+                <a:spcPts val="600"/>
               </a:spcAft>
               <a:defRPr sz="1200" b="1">
                 <a:solidFill>
-                  <a:srgbClr val="F8FAFC"/>
-                </a:solidFill>
-                <a:latin typeface="Segoe UI"/>
-              </a:defRPr>
-            </a:pPr>
-            <a:r>
-              <a:t>• Review Time per Case: </a:t>
-            </a:r>
-            <a:r>
-              <a:rPr b="0">
+                  <a:srgbClr val="EAB308"/>
+                </a:solidFill>
+                <a:latin typeface="Segoe UI"/>
+              </a:defRPr>
+            </a:pPr>
+            <a:r>
+              <a:t>Typical Insurance Denial Letter (Real Example):</a:t>
+            </a:r>
+          </a:p>
+          <a:p>
+            <a:pPr>
+              <a:spcBef>
+                <a:spcPts val="11000"/>
+              </a:spcBef>
+              <a:defRPr sz="1200">
                 <a:solidFill>
                   <a:srgbClr val="94A3B8"/>
                 </a:solidFill>
-              </a:rPr>
-              <a:t>45 Minutes  ➔  </a:t>
-            </a:r>
-            <a:r>
-              <a:rPr b="1">
-                <a:solidFill>
-                  <a:srgbClr val="14B8A6"/>
-                </a:solidFill>
-              </a:rPr>
-              <a:t>11.4 Seconds </a:t>
-            </a:r>
-            <a:r>
-              <a:rPr b="1">
-                <a:solidFill>
-                  <a:srgbClr val="22C55E"/>
-                </a:solidFill>
-              </a:rPr>
-              <a:t>(98.6% Reduction)</a:t>
-            </a:r>
-          </a:p>
-          <a:p>
-            <a:pPr>
-              <a:spcAft>
-                <a:spcPts val="1200"/>
-              </a:spcAft>
-              <a:defRPr sz="1200" b="1">
-                <a:solidFill>
-                  <a:srgbClr val="F8FAFC"/>
-                </a:solidFill>
-                <a:latin typeface="Segoe UI"/>
-              </a:defRPr>
-            </a:pPr>
-            <a:r>
-              <a:t>• Turnaround to Payer: </a:t>
-            </a:r>
-            <a:r>
-              <a:rPr b="0">
-                <a:solidFill>
-                  <a:srgbClr val="94A3B8"/>
-                </a:solidFill>
-              </a:rPr>
-              <a:t>3 to 7 Days  ➔  </a:t>
-            </a:r>
-            <a:r>
-              <a:rPr b="1">
-                <a:solidFill>
-                  <a:srgbClr val="14B8A6"/>
-                </a:solidFill>
-              </a:rPr>
-              <a:t>Instant Electronic </a:t>
-            </a:r>
-            <a:r>
-              <a:rPr b="1">
-                <a:solidFill>
-                  <a:srgbClr val="22C55E"/>
-                </a:solidFill>
-              </a:rPr>
-              <a:t>(Real-Time Packet)</a:t>
-            </a:r>
-          </a:p>
-          <a:p>
-            <a:pPr>
-              <a:spcAft>
-                <a:spcPts val="1200"/>
-              </a:spcAft>
-              <a:defRPr sz="1200" b="1">
-                <a:solidFill>
-                  <a:srgbClr val="F8FAFC"/>
-                </a:solidFill>
-                <a:latin typeface="Segoe UI"/>
-              </a:defRPr>
-            </a:pPr>
-            <a:r>
-              <a:t>• Policy Search Overhead: </a:t>
-            </a:r>
-            <a:r>
-              <a:rPr b="0">
-                <a:solidFill>
-                  <a:srgbClr val="94A3B8"/>
-                </a:solidFill>
-              </a:rPr>
-              <a:t>Manual 80-pg PDF  ➔  </a:t>
-            </a:r>
-            <a:r>
-              <a:rPr b="1">
-                <a:solidFill>
-                  <a:srgbClr val="14B8A6"/>
-                </a:solidFill>
-              </a:rPr>
-              <a:t>&lt;150ms Vector Search </a:t>
-            </a:r>
-            <a:r>
-              <a:rPr b="1">
-                <a:solidFill>
-                  <a:srgbClr val="22C55E"/>
-                </a:solidFill>
-              </a:rPr>
-              <a:t>(99% Faster Lookup)</a:t>
-            </a:r>
-          </a:p>
-          <a:p>
-            <a:pPr>
-              <a:spcAft>
-                <a:spcPts val="1200"/>
-              </a:spcAft>
-              <a:defRPr sz="1200" b="1">
-                <a:solidFill>
-                  <a:srgbClr val="F8FAFC"/>
-                </a:solidFill>
-                <a:latin typeface="Segoe UI"/>
-              </a:defRPr>
-            </a:pPr>
-            <a:r>
-              <a:t>• Missing Step-Therapy: </a:t>
-            </a:r>
-            <a:r>
-              <a:rPr b="0">
-                <a:solidFill>
-                  <a:srgbClr val="94A3B8"/>
-                </a:solidFill>
-              </a:rPr>
-              <a:t>Payer Denial (Week delay)  ➔  </a:t>
-            </a:r>
-            <a:r>
-              <a:rPr b="1">
-                <a:solidFill>
-                  <a:srgbClr val="14B8A6"/>
-                </a:solidFill>
-              </a:rPr>
-              <a:t>Pre-submission Alert </a:t>
-            </a:r>
-            <a:r>
-              <a:rPr b="1">
-                <a:solidFill>
-                  <a:srgbClr val="22C55E"/>
-                </a:solidFill>
-              </a:rPr>
-              <a:t>(Zero Denial Delays)</a:t>
-            </a:r>
-          </a:p>
-          <a:p>
-            <a:pPr>
-              <a:spcAft>
-                <a:spcPts val="1200"/>
-              </a:spcAft>
-              <a:defRPr sz="1200" b="1">
-                <a:solidFill>
-                  <a:srgbClr val="F8FAFC"/>
-                </a:solidFill>
-                <a:latin typeface="Segoe UI"/>
-              </a:defRPr>
-            </a:pPr>
-            <a:r>
-              <a:t>• Patient Clarity: </a:t>
-            </a:r>
-            <a:r>
-              <a:rPr b="0">
-                <a:solidFill>
-                  <a:srgbClr val="94A3B8"/>
-                </a:solidFill>
-              </a:rPr>
-              <a:t>Incomprehensible  ➔  </a:t>
-            </a:r>
-            <a:r>
-              <a:rPr b="1">
-                <a:solidFill>
-                  <a:srgbClr val="14B8A6"/>
-                </a:solidFill>
-              </a:rPr>
-              <a:t>6th-grade (EN, ES, HI) </a:t>
-            </a:r>
-            <a:r>
-              <a:rPr b="1">
-                <a:solidFill>
-                  <a:srgbClr val="22C55E"/>
-                </a:solidFill>
-              </a:rPr>
-              <a:t>(100% Transparency)</a:t>
+                <a:latin typeface="Segoe UI"/>
+              </a:defRPr>
+            </a:pPr>
+            <a:r>
+              <a:t>The Result: 90% of patients do not understand why their care was denied, leading to panic, missed appointments, and worsened clinical outcomes.</a:t>
             </a:r>
           </a:p>
         </p:txBody>
@@ -5254,8 +5244,63 @@
         </p:nvSpPr>
         <p:spPr>
           <a:xfrm>
-            <a:off x="7818120" y="1554480"/>
-            <a:ext cx="3639312" cy="2240280"/>
+            <a:off x="1005840" y="2926080"/>
+            <a:ext cx="4718304" cy="1645920"/>
+          </a:xfrm>
+          <a:prstGeom prst="roundRect">
+            <a:avLst/>
+          </a:prstGeom>
+          <a:solidFill>
+            <a:srgbClr val="0F172A"/>
+          </a:solidFill>
+          <a:ln>
+            <a:solidFill>
+              <a:srgbClr val="334155"/>
+            </a:solidFill>
+          </a:ln>
+        </p:spPr>
+        <p:style>
+          <a:lnRef idx="1">
+            <a:schemeClr val="accent1"/>
+          </a:lnRef>
+          <a:fillRef idx="3">
+            <a:schemeClr val="accent1"/>
+          </a:fillRef>
+          <a:effectRef idx="2">
+            <a:schemeClr val="accent1"/>
+          </a:effectRef>
+          <a:fontRef idx="minor">
+            <a:schemeClr val="lt1"/>
+          </a:fontRef>
+        </p:style>
+        <p:txBody>
+          <a:bodyPr rtlCol="0" anchor="ctr" wrap="square"/>
+          <a:lstStyle/>
+          <a:p>
+            <a:pPr algn="ctr">
+              <a:defRPr sz="1100" i="1">
+                <a:solidFill>
+                  <a:srgbClr val="94A3B8"/>
+                </a:solidFill>
+                <a:latin typeface="Segoe UI"/>
+              </a:defRPr>
+            </a:pPr>
+            <a:r>
+              <a:t>"Coverage for CPT 29881 is denied pursuant to CG-SURG-01 §3.b.ii due to failure to demonstrate exhaustion of conservative physical medicine modalities and non-congruent radiologic MRI documentation of chondromalacia patellae."</a:t>
+            </a:r>
+          </a:p>
+        </p:txBody>
+      </p:sp>
+      <p:sp>
+        <p:nvSpPr>
+          <p:cNvPr id="9" name="Rounded Rectangle 8"/>
+          <p:cNvSpPr/>
+          <p:nvPr/>
+        </p:nvSpPr>
+        <p:spPr>
+          <a:xfrm>
+            <a:off x="6190488" y="1554480"/>
+            <a:ext cx="5266944" cy="4754880"/>
           </a:xfrm>
           <a:prstGeom prst="roundRect">
             <a:avLst/>
@@ -5293,14 +5338,14 @@
       </p:sp>
       <p:sp>
         <p:nvSpPr>
-          <p:cNvPr id="9" name="TextBox 8"/>
+          <p:cNvPr id="10" name="TextBox 9"/>
           <p:cNvSpPr txBox="1"/>
           <p:nvPr/>
         </p:nvSpPr>
         <p:spPr>
           <a:xfrm>
-            <a:off x="8001000" y="1691640"/>
-            <a:ext cx="3273552" cy="1920240"/>
+            <a:off x="6464808" y="1737360"/>
+            <a:ext cx="4718304" cy="4389120"/>
           </a:xfrm>
           <a:prstGeom prst="rect">
             <a:avLst/>
@@ -5315,25 +5360,25 @@
           <a:p>
             <a:pPr>
               <a:spcAft>
-                <a:spcPts val="400"/>
-              </a:spcAft>
-              <a:defRPr sz="2800" b="1">
-                <a:solidFill>
-                  <a:srgbClr val="22C55E"/>
-                </a:solidFill>
-                <a:latin typeface="Segoe UI"/>
-              </a:defRPr>
-            </a:pPr>
-            <a:r>
-              <a:t>$182,000 / Year</a:t>
-            </a:r>
-          </a:p>
-          <a:p>
-            <a:pPr>
-              <a:spcAft>
                 <a:spcPts val="600"/>
               </a:spcAft>
-              <a:defRPr sz="1100" b="1">
+              <a:defRPr sz="1400" b="1">
+                <a:solidFill>
+                  <a:srgbClr val="14B8A6"/>
+                </a:solidFill>
+                <a:latin typeface="Segoe UI"/>
+              </a:defRPr>
+            </a:pPr>
+            <a:r>
+              <a:t>CAREAUTH-ROCM PATIENT TAB</a:t>
+            </a:r>
+          </a:p>
+          <a:p>
+            <a:pPr>
+              <a:spcAft>
+                <a:spcPts val="1400"/>
+              </a:spcAft>
+              <a:defRPr sz="1800" b="1">
                 <a:solidFill>
                   <a:srgbClr val="F8FAFC"/>
                 </a:solidFill>
@@ -5341,11 +5386,30 @@
               </a:defRPr>
             </a:pPr>
             <a:r>
-              <a:t>SAVINGS PER MID-SIZED CLINIC</a:t>
-            </a:r>
-          </a:p>
-          <a:p>
-            <a:pPr>
+              <a:t>6th-Grade Reading Level in 3 Languages</a:t>
+            </a:r>
+          </a:p>
+          <a:p>
+            <a:pPr>
+              <a:spcAft>
+                <a:spcPts val="200"/>
+              </a:spcAft>
+              <a:defRPr sz="1200" b="1">
+                <a:solidFill>
+                  <a:srgbClr val="06B6D4"/>
+                </a:solidFill>
+                <a:latin typeface="Segoe UI"/>
+              </a:defRPr>
+            </a:pPr>
+            <a:r>
+              <a:t>English Summary: </a:t>
+            </a:r>
+          </a:p>
+          <a:p>
+            <a:pPr>
+              <a:spcAft>
+                <a:spcPts val="800"/>
+              </a:spcAft>
               <a:defRPr sz="1100">
                 <a:solidFill>
                   <a:srgbClr val="94A3B8"/>
@@ -5354,83 +5418,15 @@
               </a:defRPr>
             </a:pPr>
             <a:r>
-              <a:t>Eliminating 14 hours/week of physician administrative overtime across a 10-provider orthopedic or rheumatology practice.</a:t>
-            </a:r>
-          </a:p>
-        </p:txBody>
-      </p:sp>
-      <p:sp>
-        <p:nvSpPr>
-          <p:cNvPr id="10" name="Rounded Rectangle 9"/>
-          <p:cNvSpPr/>
-          <p:nvPr/>
-        </p:nvSpPr>
-        <p:spPr>
-          <a:xfrm>
-            <a:off x="7818120" y="4069080"/>
-            <a:ext cx="3639312" cy="2240280"/>
-          </a:xfrm>
-          <a:prstGeom prst="roundRect">
-            <a:avLst/>
-          </a:prstGeom>
-          <a:solidFill>
-            <a:srgbClr val="1E293B"/>
-          </a:solidFill>
-          <a:ln w="15240">
-            <a:solidFill>
-              <a:srgbClr val="334155"/>
-            </a:solidFill>
-          </a:ln>
-        </p:spPr>
-        <p:style>
-          <a:lnRef idx="1">
-            <a:schemeClr val="accent1"/>
-          </a:lnRef>
-          <a:fillRef idx="3">
-            <a:schemeClr val="accent1"/>
-          </a:fillRef>
-          <a:effectRef idx="2">
-            <a:schemeClr val="accent1"/>
-          </a:effectRef>
-          <a:fontRef idx="minor">
-            <a:schemeClr val="lt1"/>
-          </a:fontRef>
-        </p:style>
-        <p:txBody>
-          <a:bodyPr rtlCol="0" anchor="ctr"/>
-          <a:lstStyle/>
-          <a:p>
-            <a:pPr algn="ctr"/>
-          </a:p>
-        </p:txBody>
-      </p:sp>
-      <p:sp>
-        <p:nvSpPr>
-          <p:cNvPr id="11" name="TextBox 10"/>
-          <p:cNvSpPr txBox="1"/>
-          <p:nvPr/>
-        </p:nvSpPr>
-        <p:spPr>
-          <a:xfrm>
-            <a:off x="8001000" y="4206240"/>
-            <a:ext cx="3273552" cy="1920240"/>
-          </a:xfrm>
-          <a:prstGeom prst="rect">
-            <a:avLst/>
-          </a:prstGeom>
-          <a:noFill/>
-        </p:spPr>
-        <p:txBody>
-          <a:bodyPr wrap="square">
-            <a:spAutoFit/>
-          </a:bodyPr>
-          <a:lstStyle/>
-          <a:p>
-            <a:pPr>
-              <a:spcAft>
-                <a:spcPts val="400"/>
-              </a:spcAft>
-              <a:defRPr sz="2800" b="1">
+              <a:t>"Good news! Your knee surgery has been approved. Your doctor showed you did 6 months of physical therapy and your MRI confirmed a torn meniscus."</a:t>
+            </a:r>
+          </a:p>
+          <a:p>
+            <a:pPr>
+              <a:spcAft>
+                <a:spcPts val="200"/>
+              </a:spcAft>
+              <a:defRPr sz="1200" b="1">
                 <a:solidFill>
                   <a:srgbClr val="06B6D4"/>
                 </a:solidFill>
@@ -5438,27 +5434,14 @@
               </a:defRPr>
             </a:pPr>
             <a:r>
-              <a:t>74% Fewer Denials</a:t>
-            </a:r>
-          </a:p>
-          <a:p>
-            <a:pPr>
-              <a:spcAft>
-                <a:spcPts val="600"/>
-              </a:spcAft>
-              <a:defRPr sz="1100" b="1">
-                <a:solidFill>
-                  <a:srgbClr val="F8FAFC"/>
-                </a:solidFill>
-                <a:latin typeface="Segoe UI"/>
-              </a:defRPr>
-            </a:pPr>
-            <a:r>
-              <a:t>PRE-SUBMISSION VERIFICATION</a:t>
-            </a:r>
-          </a:p>
-          <a:p>
-            <a:pPr>
+              <a:t>Español (Spanish): </a:t>
+            </a:r>
+          </a:p>
+          <a:p>
+            <a:pPr>
+              <a:spcAft>
+                <a:spcPts val="800"/>
+              </a:spcAft>
               <a:defRPr sz="1100">
                 <a:solidFill>
                   <a:srgbClr val="94A3B8"/>
@@ -5467,7 +5450,39 @@
               </a:defRPr>
             </a:pPr>
             <a:r>
-              <a:t>Catching evidence gaps and step-therapy issues before filing eliminates 74% of initial insurer rejections and costly rework.</a:t>
+              <a:t>"¡Buenas noticias! Su cirugía de rodilla ha sido aprobada. Su médico demostró que completó 6 meses de fisioterapia y su resonancia confirmó un desgarro de menisco."</a:t>
+            </a:r>
+          </a:p>
+          <a:p>
+            <a:pPr>
+              <a:spcAft>
+                <a:spcPts val="200"/>
+              </a:spcAft>
+              <a:defRPr sz="1200" b="1">
+                <a:solidFill>
+                  <a:srgbClr val="06B6D4"/>
+                </a:solidFill>
+                <a:latin typeface="Segoe UI"/>
+              </a:defRPr>
+            </a:pPr>
+            <a:r>
+              <a:t>हिंदी (Hindi): </a:t>
+            </a:r>
+          </a:p>
+          <a:p>
+            <a:pPr>
+              <a:spcAft>
+                <a:spcPts val="800"/>
+              </a:spcAft>
+              <a:defRPr sz="1100">
+                <a:solidFill>
+                  <a:srgbClr val="94A3B8"/>
+                </a:solidFill>
+                <a:latin typeface="Segoe UI"/>
+              </a:defRPr>
+            </a:pPr>
+            <a:r>
+              <a:t>"अच्छी खबर! आपकी घुटने की सर्जरी स्वीकृत हो गई है। आपके डॉक्टर ने दिखाया कि आपने 6 महीने फिजियोथेरेपी पूरी की और एमआरआई में मेनिस्कस टियर की पुष्टि हुई।"</a:t>
             </a:r>
           </a:p>
         </p:txBody>
@@ -5564,7 +5579,7 @@
               </a:defRPr>
             </a:pPr>
             <a:r>
-              <a:t>FUTURE ROADMAP  •  TRACK 2: HEALTH &amp; WELLBEING | EVOLUS ON AMD</a:t>
+              <a:t>AMD HARDWARE BENCHMARKS  •  TRACK 2: HEALTH &amp; WELLBEING | EVOLUS ON AMD</a:t>
             </a:r>
           </a:p>
         </p:txBody>
@@ -5600,7 +5615,7 @@
               </a:defRPr>
             </a:pPr>
             <a:r>
-              <a:t>Production Roadmap &amp; Clinical Deployment</a:t>
+              <a:t>AMD Instinct™ MI300X: Why Silicon Matters in Healthcare</a:t>
             </a:r>
           </a:p>
         </p:txBody>
@@ -5656,8 +5671,8 @@
         </p:nvSpPr>
         <p:spPr>
           <a:xfrm>
-            <a:off x="731520" y="1554480"/>
-            <a:ext cx="3474720" cy="4754880"/>
+            <a:off x="731520" y="1645920"/>
+            <a:ext cx="2560320" cy="2194560"/>
           </a:xfrm>
           <a:prstGeom prst="roundRect">
             <a:avLst/>
@@ -5701,8 +5716,8 @@
         </p:nvSpPr>
         <p:spPr>
           <a:xfrm>
-            <a:off x="914400" y="1737360"/>
-            <a:ext cx="3108960" cy="4389120"/>
+            <a:off x="868680" y="1737360"/>
+            <a:ext cx="2286000" cy="2011680"/>
           </a:xfrm>
           <a:prstGeom prst="rect">
             <a:avLst/>
@@ -5719,111 +5734,44 @@
               <a:spcAft>
                 <a:spcPts val="200"/>
               </a:spcAft>
+              <a:defRPr sz="2200" b="1">
+                <a:solidFill>
+                  <a:srgbClr val="ED1C24"/>
+                </a:solidFill>
+                <a:latin typeface="Segoe UI"/>
+              </a:defRPr>
+            </a:pPr>
+            <a:r>
+              <a:t>192 GB HBM3</a:t>
+            </a:r>
+          </a:p>
+          <a:p>
+            <a:pPr>
+              <a:spcAft>
+                <a:spcPts val="600"/>
+              </a:spcAft>
               <a:defRPr sz="1100" b="1">
                 <a:solidFill>
-                  <a:srgbClr val="22C55E"/>
-                </a:solidFill>
-                <a:latin typeface="Segoe UI"/>
-              </a:defRPr>
-            </a:pPr>
-            <a:r>
-              <a:t>PHASE 1: PROTOTYPE (COMPLETED)</a:t>
-            </a:r>
-          </a:p>
-          <a:p>
-            <a:pPr>
-              <a:spcAft>
-                <a:spcPts val="1600"/>
-              </a:spcAft>
-              <a:defRPr sz="1700" b="1">
-                <a:solidFill>
                   <a:srgbClr val="F8FAFC"/>
                 </a:solidFill>
                 <a:latin typeface="Segoe UI"/>
               </a:defRPr>
             </a:pPr>
             <a:r>
-              <a:t>Hackathon Working MVP</a:t>
-            </a:r>
-          </a:p>
-          <a:p>
-            <a:pPr>
-              <a:spcAft>
-                <a:spcPts val="800"/>
-              </a:spcAft>
-              <a:defRPr sz="1200">
-                <a:solidFill>
-                  <a:srgbClr val="F8FAFC"/>
-                </a:solidFill>
-                <a:latin typeface="Segoe UI"/>
-              </a:defRPr>
-            </a:pPr>
-            <a:r>
-              <a:t>✔ Multi-agent Evolus orchestration</a:t>
-            </a:r>
-          </a:p>
-          <a:p>
-            <a:pPr>
-              <a:spcAft>
-                <a:spcPts val="800"/>
-              </a:spcAft>
-              <a:defRPr sz="1200">
-                <a:solidFill>
-                  <a:srgbClr val="F8FAFC"/>
-                </a:solidFill>
-                <a:latin typeface="Segoe UI"/>
-              </a:defRPr>
-            </a:pPr>
-            <a:r>
-              <a:t>✔ AMD Instinct MI300X vLLM backend</a:t>
-            </a:r>
-          </a:p>
-          <a:p>
-            <a:pPr>
-              <a:spcAft>
-                <a:spcPts val="800"/>
-              </a:spcAft>
-              <a:defRPr sz="1200">
-                <a:solidFill>
-                  <a:srgbClr val="F8FAFC"/>
-                </a:solidFill>
-                <a:latin typeface="Segoe UI"/>
-              </a:defRPr>
-            </a:pPr>
-            <a:r>
-              <a:t>✔ Evidence Gap &amp; Confidence Matrix</a:t>
-            </a:r>
-          </a:p>
-          <a:p>
-            <a:pPr>
-              <a:spcAft>
-                <a:spcPts val="800"/>
-              </a:spcAft>
-              <a:defRPr sz="1200">
-                <a:solidFill>
-                  <a:srgbClr val="F8FAFC"/>
-                </a:solidFill>
-                <a:latin typeface="Segoe UI"/>
-              </a:defRPr>
-            </a:pPr>
-            <a:r>
-              <a:t>✔ 3 Golden Clinical Scenarios tested</a:t>
-            </a:r>
-          </a:p>
-          <a:p>
-            <a:pPr>
-              <a:spcAft>
-                <a:spcPts val="800"/>
-              </a:spcAft>
-              <a:defRPr sz="1200">
-                <a:solidFill>
-                  <a:srgbClr val="F8FAFC"/>
-                </a:solidFill>
-                <a:latin typeface="Segoe UI"/>
-              </a:defRPr>
-            </a:pPr>
-            <a:r>
-              <a:t>✔ Multilingual Patient summaries</a:t>
+              <a:t>ZERO LOSSY CHUNKING</a:t>
+            </a:r>
+          </a:p>
+          <a:p>
+            <a:pPr>
+              <a:defRPr sz="1100">
+                <a:solidFill>
+                  <a:srgbClr val="94A3B8"/>
+                </a:solidFill>
+                <a:latin typeface="Segoe UI"/>
+              </a:defRPr>
+            </a:pPr>
+            <a:r>
+              <a:t>Allows holding entire 45-page patient records and 80-page payer manuals simultaneously in high-bandwidth memory.</a:t>
             </a:r>
           </a:p>
         </p:txBody>
@@ -5836,8 +5784,8 @@
         </p:nvSpPr>
         <p:spPr>
           <a:xfrm>
-            <a:off x="4361688" y="1554480"/>
-            <a:ext cx="3474720" cy="4754880"/>
+            <a:off x="3456432" y="1645920"/>
+            <a:ext cx="2560320" cy="2194560"/>
           </a:xfrm>
           <a:prstGeom prst="roundRect">
             <a:avLst/>
@@ -5881,8 +5829,8 @@
         </p:nvSpPr>
         <p:spPr>
           <a:xfrm>
-            <a:off x="4544568" y="1737360"/>
-            <a:ext cx="3108960" cy="4389120"/>
+            <a:off x="3593592" y="1737360"/>
+            <a:ext cx="2286000" cy="2011680"/>
           </a:xfrm>
           <a:prstGeom prst="rect">
             <a:avLst/>
@@ -5899,39 +5847,36 @@
               <a:spcAft>
                 <a:spcPts val="200"/>
               </a:spcAft>
+              <a:defRPr sz="2200" b="1">
+                <a:solidFill>
+                  <a:srgbClr val="06B6D4"/>
+                </a:solidFill>
+                <a:latin typeface="Segoe UI"/>
+              </a:defRPr>
+            </a:pPr>
+            <a:r>
+              <a:t>86.4 tok / sec</a:t>
+            </a:r>
+          </a:p>
+          <a:p>
+            <a:pPr>
+              <a:spcAft>
+                <a:spcPts val="600"/>
+              </a:spcAft>
               <a:defRPr sz="1100" b="1">
                 <a:solidFill>
-                  <a:srgbClr val="06B6D4"/>
-                </a:solidFill>
-                <a:latin typeface="Segoe UI"/>
-              </a:defRPr>
-            </a:pPr>
-            <a:r>
-              <a:t>PHASE 2: PILOT (Q1 2027)</a:t>
-            </a:r>
-          </a:p>
-          <a:p>
-            <a:pPr>
-              <a:spcAft>
-                <a:spcPts val="1600"/>
-              </a:spcAft>
-              <a:defRPr sz="1700" b="1">
-                <a:solidFill>
                   <a:srgbClr val="F8FAFC"/>
                 </a:solidFill>
                 <a:latin typeface="Segoe UI"/>
               </a:defRPr>
             </a:pPr>
             <a:r>
-              <a:t>EHR &amp; Clearinghouse Integration</a:t>
-            </a:r>
-          </a:p>
-          <a:p>
-            <a:pPr>
-              <a:spcAft>
-                <a:spcPts val="800"/>
-              </a:spcAft>
-              <a:defRPr sz="1200">
+              <a:t>SUSTAINED INFERENCE</a:t>
+            </a:r>
+          </a:p>
+          <a:p>
+            <a:pPr>
+              <a:defRPr sz="1100">
                 <a:solidFill>
                   <a:srgbClr val="94A3B8"/>
                 </a:solidFill>
@@ -5939,71 +5884,7 @@
               </a:defRPr>
             </a:pPr>
             <a:r>
-              <a:t>• FHIR &amp; HL7 v2 connectors (Epic / Cerner)</a:t>
-            </a:r>
-          </a:p>
-          <a:p>
-            <a:pPr>
-              <a:spcAft>
-                <a:spcPts val="800"/>
-              </a:spcAft>
-              <a:defRPr sz="1200">
-                <a:solidFill>
-                  <a:srgbClr val="94A3B8"/>
-                </a:solidFill>
-                <a:latin typeface="Segoe UI"/>
-              </a:defRPr>
-            </a:pPr>
-            <a:r>
-              <a:t>• Direct EDI 278 real-time payer clearinghouse</a:t>
-            </a:r>
-          </a:p>
-          <a:p>
-            <a:pPr>
-              <a:spcAft>
-                <a:spcPts val="800"/>
-              </a:spcAft>
-              <a:defRPr sz="1200">
-                <a:solidFill>
-                  <a:srgbClr val="94A3B8"/>
-                </a:solidFill>
-                <a:latin typeface="Segoe UI"/>
-              </a:defRPr>
-            </a:pPr>
-            <a:r>
-              <a:t>• Automated clinical fax ingestion via OCR</a:t>
-            </a:r>
-          </a:p>
-          <a:p>
-            <a:pPr>
-              <a:spcAft>
-                <a:spcPts val="800"/>
-              </a:spcAft>
-              <a:defRPr sz="1200">
-                <a:solidFill>
-                  <a:srgbClr val="94A3B8"/>
-                </a:solidFill>
-                <a:latin typeface="Segoe UI"/>
-              </a:defRPr>
-            </a:pPr>
-            <a:r>
-              <a:t>• Nurse review queue Slack/Teams webhooks</a:t>
-            </a:r>
-          </a:p>
-          <a:p>
-            <a:pPr>
-              <a:spcAft>
-                <a:spcPts val="800"/>
-              </a:spcAft>
-              <a:defRPr sz="1200">
-                <a:solidFill>
-                  <a:srgbClr val="94A3B8"/>
-                </a:solidFill>
-                <a:latin typeface="Segoe UI"/>
-              </a:defRPr>
-            </a:pPr>
-            <a:r>
-              <a:t>• On-premise AMD ROCm appliance deployment</a:t>
+              <a:t>High-throughput token generation allows multi-agent cross-referencing in under 12 seconds per case.</a:t>
             </a:r>
           </a:p>
         </p:txBody>
@@ -6016,8 +5897,8 @@
         </p:nvSpPr>
         <p:spPr>
           <a:xfrm>
-            <a:off x="7991856" y="1554480"/>
-            <a:ext cx="3474720" cy="4754880"/>
+            <a:off x="6181344" y="1645920"/>
+            <a:ext cx="2560320" cy="2194560"/>
           </a:xfrm>
           <a:prstGeom prst="roundRect">
             <a:avLst/>
@@ -6061,8 +5942,8 @@
         </p:nvSpPr>
         <p:spPr>
           <a:xfrm>
-            <a:off x="8174736" y="1737360"/>
-            <a:ext cx="3108960" cy="4389120"/>
+            <a:off x="6318504" y="1737360"/>
+            <a:ext cx="2286000" cy="2011680"/>
           </a:xfrm>
           <a:prstGeom prst="rect">
             <a:avLst/>
@@ -6079,111 +5960,313 @@
               <a:spcAft>
                 <a:spcPts val="200"/>
               </a:spcAft>
+              <a:defRPr sz="2200" b="1">
+                <a:solidFill>
+                  <a:srgbClr val="14B8A6"/>
+                </a:solidFill>
+                <a:latin typeface="Segoe UI"/>
+              </a:defRPr>
+            </a:pPr>
+            <a:r>
+              <a:t>192 ms TTFT</a:t>
+            </a:r>
+          </a:p>
+          <a:p>
+            <a:pPr>
+              <a:spcAft>
+                <a:spcPts val="600"/>
+              </a:spcAft>
               <a:defRPr sz="1100" b="1">
                 <a:solidFill>
-                  <a:srgbClr val="A855F7"/>
-                </a:solidFill>
-                <a:latin typeface="Segoe UI"/>
-              </a:defRPr>
-            </a:pPr>
-            <a:r>
-              <a:t>PHASE 3: SCALE (Q3 2027)</a:t>
-            </a:r>
-          </a:p>
-          <a:p>
-            <a:pPr>
-              <a:spcAft>
-                <a:spcPts val="1600"/>
-              </a:spcAft>
-              <a:defRPr sz="1700" b="1">
-                <a:solidFill>
                   <a:srgbClr val="F8FAFC"/>
                 </a:solidFill>
                 <a:latin typeface="Segoe UI"/>
               </a:defRPr>
             </a:pPr>
             <a:r>
-              <a:t>Full Autonomous Health Network</a:t>
-            </a:r>
-          </a:p>
+              <a:t>TIME-TO-FIRST-TOKEN</a:t>
+            </a:r>
+          </a:p>
+          <a:p>
+            <a:pPr>
+              <a:defRPr sz="1100">
+                <a:solidFill>
+                  <a:srgbClr val="94A3B8"/>
+                </a:solidFill>
+                <a:latin typeface="Segoe UI"/>
+              </a:defRPr>
+            </a:pPr>
+            <a:r>
+              <a:t>Instantaneous clinical responsiveness, enabling interactive doctor review without UI freezing.</a:t>
+            </a:r>
+          </a:p>
+        </p:txBody>
+      </p:sp>
+      <p:sp>
+        <p:nvSpPr>
+          <p:cNvPr id="12" name="Rounded Rectangle 11"/>
+          <p:cNvSpPr/>
+          <p:nvPr/>
+        </p:nvSpPr>
+        <p:spPr>
+          <a:xfrm>
+            <a:off x="8906256" y="1645920"/>
+            <a:ext cx="2560320" cy="2194560"/>
+          </a:xfrm>
+          <a:prstGeom prst="roundRect">
+            <a:avLst/>
+          </a:prstGeom>
+          <a:solidFill>
+            <a:srgbClr val="1E293B"/>
+          </a:solidFill>
+          <a:ln w="15240">
+            <a:solidFill>
+              <a:srgbClr val="334155"/>
+            </a:solidFill>
+          </a:ln>
+        </p:spPr>
+        <p:style>
+          <a:lnRef idx="1">
+            <a:schemeClr val="accent1"/>
+          </a:lnRef>
+          <a:fillRef idx="3">
+            <a:schemeClr val="accent1"/>
+          </a:fillRef>
+          <a:effectRef idx="2">
+            <a:schemeClr val="accent1"/>
+          </a:effectRef>
+          <a:fontRef idx="minor">
+            <a:schemeClr val="lt1"/>
+          </a:fontRef>
+        </p:style>
+        <p:txBody>
+          <a:bodyPr rtlCol="0" anchor="ctr"/>
+          <a:lstStyle/>
+          <a:p>
+            <a:pPr algn="ctr"/>
+          </a:p>
+        </p:txBody>
+      </p:sp>
+      <p:sp>
+        <p:nvSpPr>
+          <p:cNvPr id="13" name="TextBox 12"/>
+          <p:cNvSpPr txBox="1"/>
+          <p:nvPr/>
+        </p:nvSpPr>
+        <p:spPr>
+          <a:xfrm>
+            <a:off x="9043416" y="1737360"/>
+            <a:ext cx="2286000" cy="2011680"/>
+          </a:xfrm>
+          <a:prstGeom prst="rect">
+            <a:avLst/>
+          </a:prstGeom>
+          <a:noFill/>
+        </p:spPr>
+        <p:txBody>
+          <a:bodyPr wrap="square">
+            <a:spAutoFit/>
+          </a:bodyPr>
+          <a:lstStyle/>
+          <a:p>
+            <a:pPr>
+              <a:spcAft>
+                <a:spcPts val="200"/>
+              </a:spcAft>
+              <a:defRPr sz="2200" b="1">
+                <a:solidFill>
+                  <a:srgbClr val="22C55E"/>
+                </a:solidFill>
+                <a:latin typeface="Segoe UI"/>
+              </a:defRPr>
+            </a:pPr>
+            <a:r>
+              <a:t>100% On-Prem</a:t>
+            </a:r>
+          </a:p>
+          <a:p>
+            <a:pPr>
+              <a:spcAft>
+                <a:spcPts val="600"/>
+              </a:spcAft>
+              <a:defRPr sz="1100" b="1">
+                <a:solidFill>
+                  <a:srgbClr val="F8FAFC"/>
+                </a:solidFill>
+                <a:latin typeface="Segoe UI"/>
+              </a:defRPr>
+            </a:pPr>
+            <a:r>
+              <a:t>HIPAA COMPLIANT</a:t>
+            </a:r>
+          </a:p>
+          <a:p>
+            <a:pPr>
+              <a:defRPr sz="1100">
+                <a:solidFill>
+                  <a:srgbClr val="94A3B8"/>
+                </a:solidFill>
+                <a:latin typeface="Segoe UI"/>
+              </a:defRPr>
+            </a:pPr>
+            <a:r>
+              <a:t>Guaranteed local hardware boundary prevents patient health data from ever touching third-party clouds.</a:t>
+            </a:r>
+          </a:p>
+        </p:txBody>
+      </p:sp>
+      <p:sp>
+        <p:nvSpPr>
+          <p:cNvPr id="14" name="Rounded Rectangle 13"/>
+          <p:cNvSpPr/>
+          <p:nvPr/>
+        </p:nvSpPr>
+        <p:spPr>
+          <a:xfrm>
+            <a:off x="731520" y="4114800"/>
+            <a:ext cx="10728655" cy="2194560"/>
+          </a:xfrm>
+          <a:prstGeom prst="roundRect">
+            <a:avLst/>
+          </a:prstGeom>
+          <a:solidFill>
+            <a:srgbClr val="1E293B"/>
+          </a:solidFill>
+          <a:ln w="15240">
+            <a:solidFill>
+              <a:srgbClr val="334155"/>
+            </a:solidFill>
+          </a:ln>
+        </p:spPr>
+        <p:style>
+          <a:lnRef idx="1">
+            <a:schemeClr val="accent1"/>
+          </a:lnRef>
+          <a:fillRef idx="3">
+            <a:schemeClr val="accent1"/>
+          </a:fillRef>
+          <a:effectRef idx="2">
+            <a:schemeClr val="accent1"/>
+          </a:effectRef>
+          <a:fontRef idx="minor">
+            <a:schemeClr val="lt1"/>
+          </a:fontRef>
+        </p:style>
+        <p:txBody>
+          <a:bodyPr rtlCol="0" anchor="ctr"/>
+          <a:lstStyle/>
+          <a:p>
+            <a:pPr algn="ctr"/>
+          </a:p>
+        </p:txBody>
+      </p:sp>
+      <p:sp>
+        <p:nvSpPr>
+          <p:cNvPr id="15" name="TextBox 14"/>
+          <p:cNvSpPr txBox="1"/>
+          <p:nvPr/>
+        </p:nvSpPr>
+        <p:spPr>
+          <a:xfrm>
+            <a:off x="1005840" y="4206240"/>
+            <a:ext cx="10149840" cy="2011680"/>
+          </a:xfrm>
+          <a:prstGeom prst="rect">
+            <a:avLst/>
+          </a:prstGeom>
+          <a:noFill/>
+        </p:spPr>
+        <p:txBody>
+          <a:bodyPr wrap="square">
+            <a:spAutoFit/>
+          </a:bodyPr>
+          <a:lstStyle/>
           <a:p>
             <a:pPr>
               <a:spcAft>
                 <a:spcPts val="800"/>
               </a:spcAft>
-              <a:defRPr sz="1200">
+              <a:defRPr sz="1200" b="1">
+                <a:solidFill>
+                  <a:srgbClr val="06B6D4"/>
+                </a:solidFill>
+                <a:latin typeface="Segoe UI"/>
+              </a:defRPr>
+            </a:pPr>
+            <a:r>
+              <a:t>ROCm SOFTWARE STACK &amp; DEPLOYMENT ARCHITECTURE</a:t>
+            </a:r>
+          </a:p>
+          <a:p>
+            <a:pPr>
+              <a:spcAft>
+                <a:spcPts val="600"/>
+              </a:spcAft>
+              <a:defRPr sz="1300" b="1">
+                <a:solidFill>
+                  <a:srgbClr val="F8FAFC"/>
+                </a:solidFill>
+                <a:latin typeface="Segoe UI"/>
+              </a:defRPr>
+            </a:pPr>
+            <a:r>
+              <a:t>•  vLLM on ROCm 6.2: </a:t>
+            </a:r>
+            <a:r>
+              <a:rPr b="0">
                 <a:solidFill>
                   <a:srgbClr val="94A3B8"/>
                 </a:solidFill>
-                <a:latin typeface="Segoe UI"/>
-              </a:defRPr>
-            </a:pPr>
-            <a:r>
-              <a:t>• Multi-specialty coverage (Oncology, Cardiology)</a:t>
-            </a:r>
-          </a:p>
-          <a:p>
-            <a:pPr>
-              <a:spcAft>
-                <a:spcPts val="800"/>
-              </a:spcAft>
-              <a:defRPr sz="1200">
+              </a:rPr>
+              <a:t>Leverages PagedAttention and FlashAttention-2 optimized for AMD CDNA 3 matrix cores.</a:t>
+            </a:r>
+          </a:p>
+          <a:p>
+            <a:pPr>
+              <a:spcAft>
+                <a:spcPts val="600"/>
+              </a:spcAft>
+              <a:defRPr sz="1300" b="1">
+                <a:solidFill>
+                  <a:srgbClr val="F8FAFC"/>
+                </a:solidFill>
+                <a:latin typeface="Segoe UI"/>
+              </a:defRPr>
+            </a:pPr>
+            <a:r>
+              <a:t>•  Dynamic Model Selection: </a:t>
+            </a:r>
+            <a:r>
+              <a:rPr b="0">
                 <a:solidFill>
                   <a:srgbClr val="94A3B8"/>
                 </a:solidFill>
-                <a:latin typeface="Segoe UI"/>
-              </a:defRPr>
-            </a:pPr>
-            <a:r>
-              <a:t>• Predictive Payer Denial analytics</a:t>
-            </a:r>
-          </a:p>
-          <a:p>
-            <a:pPr>
-              <a:spcAft>
-                <a:spcPts val="800"/>
-              </a:spcAft>
-              <a:defRPr sz="1200">
+              </a:rPr>
+              <a:t>Lightweight Llama-3.1-8B for instant entity extraction; Qwen-2.5-14B/70B for multi-clause clinical reasoning and appeal drafting.</a:t>
+            </a:r>
+          </a:p>
+          <a:p>
+            <a:pPr>
+              <a:spcAft>
+                <a:spcPts val="600"/>
+              </a:spcAft>
+              <a:defRPr sz="1300" b="1">
+                <a:solidFill>
+                  <a:srgbClr val="F8FAFC"/>
+                </a:solidFill>
+                <a:latin typeface="Segoe UI"/>
+              </a:defRPr>
+            </a:pPr>
+            <a:r>
+              <a:t>•  Production Telemetry HUD: </a:t>
+            </a:r>
+            <a:r>
+              <a:rPr b="0">
                 <a:solidFill>
                   <a:srgbClr val="94A3B8"/>
                 </a:solidFill>
-                <a:latin typeface="Segoe UI"/>
-              </a:defRPr>
-            </a:pPr>
-            <a:r>
-              <a:t>• Cross-hospital federated learning on AMD</a:t>
-            </a:r>
-          </a:p>
-          <a:p>
-            <a:pPr>
-              <a:spcAft>
-                <a:spcPts val="800"/>
-              </a:spcAft>
-              <a:defRPr sz="1200">
-                <a:solidFill>
-                  <a:srgbClr val="94A3B8"/>
-                </a:solidFill>
-                <a:latin typeface="Segoe UI"/>
-              </a:defRPr>
-            </a:pPr>
-            <a:r>
-              <a:t>• Direct-to-patient mobile notification app</a:t>
-            </a:r>
-          </a:p>
-          <a:p>
-            <a:pPr>
-              <a:spcAft>
-                <a:spcPts val="800"/>
-              </a:spcAft>
-              <a:defRPr sz="1200">
-                <a:solidFill>
-                  <a:srgbClr val="94A3B8"/>
-                </a:solidFill>
-                <a:latin typeface="Segoe UI"/>
-              </a:defRPr>
-            </a:pPr>
-            <a:r>
-              <a:t>• Global payer guideline synchronization</a:t>
+              </a:rPr>
+              <a:t>Real-time monitoring of GPU VRAM utilization (14.8/192 GB), generation speed, and prompt latency embedded in the clinical portal.</a:t>
             </a:r>
           </a:p>
         </p:txBody>
@@ -6280,6 +6363,1424 @@
               </a:defRPr>
             </a:pPr>
             <a:r>
+              <a:t>BUSINESS &amp; CLINICAL VALUE  •  TRACK 2: HEALTH &amp; WELLBEING | EVOLUS ON AMD</a:t>
+            </a:r>
+          </a:p>
+        </p:txBody>
+      </p:sp>
+      <p:sp>
+        <p:nvSpPr>
+          <p:cNvPr id="4" name="TextBox 3"/>
+          <p:cNvSpPr txBox="1"/>
+          <p:nvPr/>
+        </p:nvSpPr>
+        <p:spPr>
+          <a:xfrm>
+            <a:off x="731520" y="640080"/>
+            <a:ext cx="10728655" cy="640080"/>
+          </a:xfrm>
+          <a:prstGeom prst="rect">
+            <a:avLst/>
+          </a:prstGeom>
+          <a:noFill/>
+        </p:spPr>
+        <p:txBody>
+          <a:bodyPr wrap="square">
+            <a:spAutoFit/>
+          </a:bodyPr>
+          <a:lstStyle/>
+          <a:p>
+            <a:pPr>
+              <a:defRPr sz="2400" b="1">
+                <a:solidFill>
+                  <a:srgbClr val="F8FAFC"/>
+                </a:solidFill>
+                <a:latin typeface="Segoe UI"/>
+              </a:defRPr>
+            </a:pPr>
+            <a:r>
+              <a:t>Measurable Impact &amp; Clinical ROI</a:t>
+            </a:r>
+          </a:p>
+        </p:txBody>
+      </p:sp>
+      <p:sp>
+        <p:nvSpPr>
+          <p:cNvPr id="5" name="Rectangle 4"/>
+          <p:cNvSpPr/>
+          <p:nvPr/>
+        </p:nvSpPr>
+        <p:spPr>
+          <a:xfrm>
+            <a:off x="731520" y="1280160"/>
+            <a:ext cx="10728655" cy="18288"/>
+          </a:xfrm>
+          <a:prstGeom prst="rect">
+            <a:avLst/>
+          </a:prstGeom>
+          <a:solidFill>
+            <a:srgbClr val="334155"/>
+          </a:solidFill>
+          <a:ln>
+            <a:noFill/>
+          </a:ln>
+        </p:spPr>
+        <p:style>
+          <a:lnRef idx="1">
+            <a:schemeClr val="accent1"/>
+          </a:lnRef>
+          <a:fillRef idx="3">
+            <a:schemeClr val="accent1"/>
+          </a:fillRef>
+          <a:effectRef idx="2">
+            <a:schemeClr val="accent1"/>
+          </a:effectRef>
+          <a:fontRef idx="minor">
+            <a:schemeClr val="lt1"/>
+          </a:fontRef>
+        </p:style>
+        <p:txBody>
+          <a:bodyPr rtlCol="0" anchor="ctr"/>
+          <a:lstStyle/>
+          <a:p>
+            <a:pPr algn="ctr"/>
+          </a:p>
+        </p:txBody>
+      </p:sp>
+      <p:sp>
+        <p:nvSpPr>
+          <p:cNvPr id="6" name="Rounded Rectangle 5"/>
+          <p:cNvSpPr/>
+          <p:nvPr/>
+        </p:nvSpPr>
+        <p:spPr>
+          <a:xfrm>
+            <a:off x="731520" y="1554480"/>
+            <a:ext cx="6858000" cy="4754880"/>
+          </a:xfrm>
+          <a:prstGeom prst="roundRect">
+            <a:avLst/>
+          </a:prstGeom>
+          <a:solidFill>
+            <a:srgbClr val="1E293B"/>
+          </a:solidFill>
+          <a:ln w="15240">
+            <a:solidFill>
+              <a:srgbClr val="334155"/>
+            </a:solidFill>
+          </a:ln>
+        </p:spPr>
+        <p:style>
+          <a:lnRef idx="1">
+            <a:schemeClr val="accent1"/>
+          </a:lnRef>
+          <a:fillRef idx="3">
+            <a:schemeClr val="accent1"/>
+          </a:fillRef>
+          <a:effectRef idx="2">
+            <a:schemeClr val="accent1"/>
+          </a:effectRef>
+          <a:fontRef idx="minor">
+            <a:schemeClr val="lt1"/>
+          </a:fontRef>
+        </p:style>
+        <p:txBody>
+          <a:bodyPr rtlCol="0" anchor="ctr"/>
+          <a:lstStyle/>
+          <a:p>
+            <a:pPr algn="ctr"/>
+          </a:p>
+        </p:txBody>
+      </p:sp>
+      <p:sp>
+        <p:nvSpPr>
+          <p:cNvPr id="7" name="TextBox 6"/>
+          <p:cNvSpPr txBox="1"/>
+          <p:nvPr/>
+        </p:nvSpPr>
+        <p:spPr>
+          <a:xfrm>
+            <a:off x="1005840" y="1737360"/>
+            <a:ext cx="6309360" cy="4389120"/>
+          </a:xfrm>
+          <a:prstGeom prst="rect">
+            <a:avLst/>
+          </a:prstGeom>
+          <a:noFill/>
+        </p:spPr>
+        <p:txBody>
+          <a:bodyPr wrap="square">
+            <a:spAutoFit/>
+          </a:bodyPr>
+          <a:lstStyle/>
+          <a:p>
+            <a:pPr>
+              <a:spcAft>
+                <a:spcPts val="1000"/>
+              </a:spcAft>
+              <a:defRPr sz="1300" b="1">
+                <a:solidFill>
+                  <a:srgbClr val="06B6D4"/>
+                </a:solidFill>
+                <a:latin typeface="Segoe UI"/>
+              </a:defRPr>
+            </a:pPr>
+            <a:r>
+              <a:t>BENCHMARK: MANUAL VS. CAREAUTH-ROCM</a:t>
+            </a:r>
+          </a:p>
+          <a:p>
+            <a:pPr>
+              <a:spcAft>
+                <a:spcPts val="1200"/>
+              </a:spcAft>
+              <a:defRPr sz="1200" b="1">
+                <a:solidFill>
+                  <a:srgbClr val="F8FAFC"/>
+                </a:solidFill>
+                <a:latin typeface="Segoe UI"/>
+              </a:defRPr>
+            </a:pPr>
+            <a:r>
+              <a:t>• Review Time per Case: </a:t>
+            </a:r>
+            <a:r>
+              <a:rPr b="0">
+                <a:solidFill>
+                  <a:srgbClr val="94A3B8"/>
+                </a:solidFill>
+              </a:rPr>
+              <a:t>45 Minutes  ➔  </a:t>
+            </a:r>
+            <a:r>
+              <a:rPr b="1">
+                <a:solidFill>
+                  <a:srgbClr val="14B8A6"/>
+                </a:solidFill>
+              </a:rPr>
+              <a:t>11.4 Seconds </a:t>
+            </a:r>
+            <a:r>
+              <a:rPr b="1">
+                <a:solidFill>
+                  <a:srgbClr val="22C55E"/>
+                </a:solidFill>
+              </a:rPr>
+              <a:t>(98.6% Reduction)</a:t>
+            </a:r>
+          </a:p>
+          <a:p>
+            <a:pPr>
+              <a:spcAft>
+                <a:spcPts val="1200"/>
+              </a:spcAft>
+              <a:defRPr sz="1200" b="1">
+                <a:solidFill>
+                  <a:srgbClr val="F8FAFC"/>
+                </a:solidFill>
+                <a:latin typeface="Segoe UI"/>
+              </a:defRPr>
+            </a:pPr>
+            <a:r>
+              <a:t>• Turnaround to Payer: </a:t>
+            </a:r>
+            <a:r>
+              <a:rPr b="0">
+                <a:solidFill>
+                  <a:srgbClr val="94A3B8"/>
+                </a:solidFill>
+              </a:rPr>
+              <a:t>3 to 7 Days  ➔  </a:t>
+            </a:r>
+            <a:r>
+              <a:rPr b="1">
+                <a:solidFill>
+                  <a:srgbClr val="14B8A6"/>
+                </a:solidFill>
+              </a:rPr>
+              <a:t>Instant Electronic </a:t>
+            </a:r>
+            <a:r>
+              <a:rPr b="1">
+                <a:solidFill>
+                  <a:srgbClr val="22C55E"/>
+                </a:solidFill>
+              </a:rPr>
+              <a:t>(Real-Time Packet)</a:t>
+            </a:r>
+          </a:p>
+          <a:p>
+            <a:pPr>
+              <a:spcAft>
+                <a:spcPts val="1200"/>
+              </a:spcAft>
+              <a:defRPr sz="1200" b="1">
+                <a:solidFill>
+                  <a:srgbClr val="F8FAFC"/>
+                </a:solidFill>
+                <a:latin typeface="Segoe UI"/>
+              </a:defRPr>
+            </a:pPr>
+            <a:r>
+              <a:t>• Policy Search Overhead: </a:t>
+            </a:r>
+            <a:r>
+              <a:rPr b="0">
+                <a:solidFill>
+                  <a:srgbClr val="94A3B8"/>
+                </a:solidFill>
+              </a:rPr>
+              <a:t>Manual 80-pg PDF  ➔  </a:t>
+            </a:r>
+            <a:r>
+              <a:rPr b="1">
+                <a:solidFill>
+                  <a:srgbClr val="14B8A6"/>
+                </a:solidFill>
+              </a:rPr>
+              <a:t>&lt;150ms Vector Search </a:t>
+            </a:r>
+            <a:r>
+              <a:rPr b="1">
+                <a:solidFill>
+                  <a:srgbClr val="22C55E"/>
+                </a:solidFill>
+              </a:rPr>
+              <a:t>(99% Faster Lookup)</a:t>
+            </a:r>
+          </a:p>
+          <a:p>
+            <a:pPr>
+              <a:spcAft>
+                <a:spcPts val="1200"/>
+              </a:spcAft>
+              <a:defRPr sz="1200" b="1">
+                <a:solidFill>
+                  <a:srgbClr val="F8FAFC"/>
+                </a:solidFill>
+                <a:latin typeface="Segoe UI"/>
+              </a:defRPr>
+            </a:pPr>
+            <a:r>
+              <a:t>• Missing Step-Therapy: </a:t>
+            </a:r>
+            <a:r>
+              <a:rPr b="0">
+                <a:solidFill>
+                  <a:srgbClr val="94A3B8"/>
+                </a:solidFill>
+              </a:rPr>
+              <a:t>Payer Denial (Week delay)  ➔  </a:t>
+            </a:r>
+            <a:r>
+              <a:rPr b="1">
+                <a:solidFill>
+                  <a:srgbClr val="14B8A6"/>
+                </a:solidFill>
+              </a:rPr>
+              <a:t>Pre-submission Alert </a:t>
+            </a:r>
+            <a:r>
+              <a:rPr b="1">
+                <a:solidFill>
+                  <a:srgbClr val="22C55E"/>
+                </a:solidFill>
+              </a:rPr>
+              <a:t>(Zero Denial Delays)</a:t>
+            </a:r>
+          </a:p>
+          <a:p>
+            <a:pPr>
+              <a:spcAft>
+                <a:spcPts val="1200"/>
+              </a:spcAft>
+              <a:defRPr sz="1200" b="1">
+                <a:solidFill>
+                  <a:srgbClr val="F8FAFC"/>
+                </a:solidFill>
+                <a:latin typeface="Segoe UI"/>
+              </a:defRPr>
+            </a:pPr>
+            <a:r>
+              <a:t>• Patient Clarity: </a:t>
+            </a:r>
+            <a:r>
+              <a:rPr b="0">
+                <a:solidFill>
+                  <a:srgbClr val="94A3B8"/>
+                </a:solidFill>
+              </a:rPr>
+              <a:t>Incomprehensible  ➔  </a:t>
+            </a:r>
+            <a:r>
+              <a:rPr b="1">
+                <a:solidFill>
+                  <a:srgbClr val="14B8A6"/>
+                </a:solidFill>
+              </a:rPr>
+              <a:t>6th-grade (EN, ES, HI) </a:t>
+            </a:r>
+            <a:r>
+              <a:rPr b="1">
+                <a:solidFill>
+                  <a:srgbClr val="22C55E"/>
+                </a:solidFill>
+              </a:rPr>
+              <a:t>(100% Transparency)</a:t>
+            </a:r>
+          </a:p>
+        </p:txBody>
+      </p:sp>
+      <p:sp>
+        <p:nvSpPr>
+          <p:cNvPr id="8" name="Rounded Rectangle 7"/>
+          <p:cNvSpPr/>
+          <p:nvPr/>
+        </p:nvSpPr>
+        <p:spPr>
+          <a:xfrm>
+            <a:off x="7818120" y="1554480"/>
+            <a:ext cx="3639312" cy="2240280"/>
+          </a:xfrm>
+          <a:prstGeom prst="roundRect">
+            <a:avLst/>
+          </a:prstGeom>
+          <a:solidFill>
+            <a:srgbClr val="1E293B"/>
+          </a:solidFill>
+          <a:ln w="15240">
+            <a:solidFill>
+              <a:srgbClr val="334155"/>
+            </a:solidFill>
+          </a:ln>
+        </p:spPr>
+        <p:style>
+          <a:lnRef idx="1">
+            <a:schemeClr val="accent1"/>
+          </a:lnRef>
+          <a:fillRef idx="3">
+            <a:schemeClr val="accent1"/>
+          </a:fillRef>
+          <a:effectRef idx="2">
+            <a:schemeClr val="accent1"/>
+          </a:effectRef>
+          <a:fontRef idx="minor">
+            <a:schemeClr val="lt1"/>
+          </a:fontRef>
+        </p:style>
+        <p:txBody>
+          <a:bodyPr rtlCol="0" anchor="ctr"/>
+          <a:lstStyle/>
+          <a:p>
+            <a:pPr algn="ctr"/>
+          </a:p>
+        </p:txBody>
+      </p:sp>
+      <p:sp>
+        <p:nvSpPr>
+          <p:cNvPr id="9" name="TextBox 8"/>
+          <p:cNvSpPr txBox="1"/>
+          <p:nvPr/>
+        </p:nvSpPr>
+        <p:spPr>
+          <a:xfrm>
+            <a:off x="8001000" y="1691640"/>
+            <a:ext cx="3273552" cy="1920240"/>
+          </a:xfrm>
+          <a:prstGeom prst="rect">
+            <a:avLst/>
+          </a:prstGeom>
+          <a:noFill/>
+        </p:spPr>
+        <p:txBody>
+          <a:bodyPr wrap="square">
+            <a:spAutoFit/>
+          </a:bodyPr>
+          <a:lstStyle/>
+          <a:p>
+            <a:pPr>
+              <a:spcAft>
+                <a:spcPts val="400"/>
+              </a:spcAft>
+              <a:defRPr sz="2800" b="1">
+                <a:solidFill>
+                  <a:srgbClr val="22C55E"/>
+                </a:solidFill>
+                <a:latin typeface="Segoe UI"/>
+              </a:defRPr>
+            </a:pPr>
+            <a:r>
+              <a:t>$182,000 / Year</a:t>
+            </a:r>
+          </a:p>
+          <a:p>
+            <a:pPr>
+              <a:spcAft>
+                <a:spcPts val="600"/>
+              </a:spcAft>
+              <a:defRPr sz="1100" b="1">
+                <a:solidFill>
+                  <a:srgbClr val="F8FAFC"/>
+                </a:solidFill>
+                <a:latin typeface="Segoe UI"/>
+              </a:defRPr>
+            </a:pPr>
+            <a:r>
+              <a:t>SAVINGS PER MID-SIZED CLINIC</a:t>
+            </a:r>
+          </a:p>
+          <a:p>
+            <a:pPr>
+              <a:defRPr sz="1100">
+                <a:solidFill>
+                  <a:srgbClr val="94A3B8"/>
+                </a:solidFill>
+                <a:latin typeface="Segoe UI"/>
+              </a:defRPr>
+            </a:pPr>
+            <a:r>
+              <a:t>Eliminating 14 hours/week of physician administrative overtime across a 10-provider practice.</a:t>
+            </a:r>
+          </a:p>
+        </p:txBody>
+      </p:sp>
+      <p:sp>
+        <p:nvSpPr>
+          <p:cNvPr id="10" name="Rounded Rectangle 9"/>
+          <p:cNvSpPr/>
+          <p:nvPr/>
+        </p:nvSpPr>
+        <p:spPr>
+          <a:xfrm>
+            <a:off x="7818120" y="4069080"/>
+            <a:ext cx="3639312" cy="2240280"/>
+          </a:xfrm>
+          <a:prstGeom prst="roundRect">
+            <a:avLst/>
+          </a:prstGeom>
+          <a:solidFill>
+            <a:srgbClr val="1E293B"/>
+          </a:solidFill>
+          <a:ln w="15240">
+            <a:solidFill>
+              <a:srgbClr val="334155"/>
+            </a:solidFill>
+          </a:ln>
+        </p:spPr>
+        <p:style>
+          <a:lnRef idx="1">
+            <a:schemeClr val="accent1"/>
+          </a:lnRef>
+          <a:fillRef idx="3">
+            <a:schemeClr val="accent1"/>
+          </a:fillRef>
+          <a:effectRef idx="2">
+            <a:schemeClr val="accent1"/>
+          </a:effectRef>
+          <a:fontRef idx="minor">
+            <a:schemeClr val="lt1"/>
+          </a:fontRef>
+        </p:style>
+        <p:txBody>
+          <a:bodyPr rtlCol="0" anchor="ctr"/>
+          <a:lstStyle/>
+          <a:p>
+            <a:pPr algn="ctr"/>
+          </a:p>
+        </p:txBody>
+      </p:sp>
+      <p:sp>
+        <p:nvSpPr>
+          <p:cNvPr id="11" name="TextBox 10"/>
+          <p:cNvSpPr txBox="1"/>
+          <p:nvPr/>
+        </p:nvSpPr>
+        <p:spPr>
+          <a:xfrm>
+            <a:off x="8001000" y="4206240"/>
+            <a:ext cx="3273552" cy="1920240"/>
+          </a:xfrm>
+          <a:prstGeom prst="rect">
+            <a:avLst/>
+          </a:prstGeom>
+          <a:noFill/>
+        </p:spPr>
+        <p:txBody>
+          <a:bodyPr wrap="square">
+            <a:spAutoFit/>
+          </a:bodyPr>
+          <a:lstStyle/>
+          <a:p>
+            <a:pPr>
+              <a:spcAft>
+                <a:spcPts val="400"/>
+              </a:spcAft>
+              <a:defRPr sz="2800" b="1">
+                <a:solidFill>
+                  <a:srgbClr val="06B6D4"/>
+                </a:solidFill>
+                <a:latin typeface="Segoe UI"/>
+              </a:defRPr>
+            </a:pPr>
+            <a:r>
+              <a:t>74% Fewer Denials</a:t>
+            </a:r>
+          </a:p>
+          <a:p>
+            <a:pPr>
+              <a:spcAft>
+                <a:spcPts val="600"/>
+              </a:spcAft>
+              <a:defRPr sz="1100" b="1">
+                <a:solidFill>
+                  <a:srgbClr val="F8FAFC"/>
+                </a:solidFill>
+                <a:latin typeface="Segoe UI"/>
+              </a:defRPr>
+            </a:pPr>
+            <a:r>
+              <a:t>PRE-SUBMISSION VERIFICATION</a:t>
+            </a:r>
+          </a:p>
+          <a:p>
+            <a:pPr>
+              <a:defRPr sz="1100">
+                <a:solidFill>
+                  <a:srgbClr val="94A3B8"/>
+                </a:solidFill>
+                <a:latin typeface="Segoe UI"/>
+              </a:defRPr>
+            </a:pPr>
+            <a:r>
+              <a:t>Catching evidence gaps and step-therapy issues before filing eliminates 74% of initial insurer rejections.</a:t>
+            </a:r>
+          </a:p>
+        </p:txBody>
+      </p:sp>
+    </p:spTree>
+  </p:cSld>
+  <p:clrMapOvr>
+    <a:masterClrMapping/>
+  </p:clrMapOvr>
+</p:sld>
+</file>
+
+<file path=ppt/slides/slide13.xml><?xml version="1.0" encoding="utf-8"?>
+<p:sld xmlns:a="http://schemas.openxmlformats.org/drawingml/2006/main" xmlns:p="http://schemas.openxmlformats.org/presentationml/2006/main" xmlns:r="http://schemas.openxmlformats.org/officeDocument/2006/relationships">
+  <p:cSld>
+    <p:spTree>
+      <p:nvGrpSpPr>
+        <p:cNvPr id="1" name=""/>
+        <p:cNvGrpSpPr/>
+        <p:nvPr/>
+      </p:nvGrpSpPr>
+      <p:grpSpPr/>
+      <p:sp>
+        <p:nvSpPr>
+          <p:cNvPr id="2" name="Rectangle 1"/>
+          <p:cNvSpPr/>
+          <p:nvPr/>
+        </p:nvSpPr>
+        <p:spPr>
+          <a:xfrm>
+            <a:off x="0" y="0"/>
+            <a:ext cx="12191695" cy="6858000"/>
+          </a:xfrm>
+          <a:prstGeom prst="rect">
+            <a:avLst/>
+          </a:prstGeom>
+          <a:solidFill>
+            <a:srgbClr val="0F172A"/>
+          </a:solidFill>
+          <a:ln>
+            <a:noFill/>
+          </a:ln>
+        </p:spPr>
+        <p:style>
+          <a:lnRef idx="1">
+            <a:schemeClr val="accent1"/>
+          </a:lnRef>
+          <a:fillRef idx="3">
+            <a:schemeClr val="accent1"/>
+          </a:fillRef>
+          <a:effectRef idx="2">
+            <a:schemeClr val="accent1"/>
+          </a:effectRef>
+          <a:fontRef idx="minor">
+            <a:schemeClr val="lt1"/>
+          </a:fontRef>
+        </p:style>
+        <p:txBody>
+          <a:bodyPr rtlCol="0" anchor="ctr"/>
+          <a:lstStyle/>
+          <a:p>
+            <a:pPr algn="ctr"/>
+          </a:p>
+        </p:txBody>
+      </p:sp>
+      <p:sp>
+        <p:nvSpPr>
+          <p:cNvPr id="3" name="TextBox 2"/>
+          <p:cNvSpPr txBox="1"/>
+          <p:nvPr/>
+        </p:nvSpPr>
+        <p:spPr>
+          <a:xfrm>
+            <a:off x="731520" y="365760"/>
+            <a:ext cx="10728655" cy="320040"/>
+          </a:xfrm>
+          <a:prstGeom prst="rect">
+            <a:avLst/>
+          </a:prstGeom>
+          <a:noFill/>
+        </p:spPr>
+        <p:txBody>
+          <a:bodyPr wrap="square">
+            <a:spAutoFit/>
+          </a:bodyPr>
+          <a:lstStyle/>
+          <a:p>
+            <a:pPr>
+              <a:defRPr sz="1000" b="1">
+                <a:solidFill>
+                  <a:srgbClr val="ED1C24"/>
+                </a:solidFill>
+                <a:latin typeface="Segoe UI"/>
+              </a:defRPr>
+            </a:pPr>
+            <a:r>
+              <a:t>FUTURE ROADMAP  •  TRACK 2: HEALTH &amp; WELLBEING | EVOLUS ON AMD</a:t>
+            </a:r>
+          </a:p>
+        </p:txBody>
+      </p:sp>
+      <p:sp>
+        <p:nvSpPr>
+          <p:cNvPr id="4" name="TextBox 3"/>
+          <p:cNvSpPr txBox="1"/>
+          <p:nvPr/>
+        </p:nvSpPr>
+        <p:spPr>
+          <a:xfrm>
+            <a:off x="731520" y="640080"/>
+            <a:ext cx="10728655" cy="640080"/>
+          </a:xfrm>
+          <a:prstGeom prst="rect">
+            <a:avLst/>
+          </a:prstGeom>
+          <a:noFill/>
+        </p:spPr>
+        <p:txBody>
+          <a:bodyPr wrap="square">
+            <a:spAutoFit/>
+          </a:bodyPr>
+          <a:lstStyle/>
+          <a:p>
+            <a:pPr>
+              <a:defRPr sz="2400" b="1">
+                <a:solidFill>
+                  <a:srgbClr val="F8FAFC"/>
+                </a:solidFill>
+                <a:latin typeface="Segoe UI"/>
+              </a:defRPr>
+            </a:pPr>
+            <a:r>
+              <a:t>Production Roadmap &amp; Clinical Deployment</a:t>
+            </a:r>
+          </a:p>
+        </p:txBody>
+      </p:sp>
+      <p:sp>
+        <p:nvSpPr>
+          <p:cNvPr id="5" name="Rectangle 4"/>
+          <p:cNvSpPr/>
+          <p:nvPr/>
+        </p:nvSpPr>
+        <p:spPr>
+          <a:xfrm>
+            <a:off x="731520" y="1280160"/>
+            <a:ext cx="10728655" cy="18288"/>
+          </a:xfrm>
+          <a:prstGeom prst="rect">
+            <a:avLst/>
+          </a:prstGeom>
+          <a:solidFill>
+            <a:srgbClr val="334155"/>
+          </a:solidFill>
+          <a:ln>
+            <a:noFill/>
+          </a:ln>
+        </p:spPr>
+        <p:style>
+          <a:lnRef idx="1">
+            <a:schemeClr val="accent1"/>
+          </a:lnRef>
+          <a:fillRef idx="3">
+            <a:schemeClr val="accent1"/>
+          </a:fillRef>
+          <a:effectRef idx="2">
+            <a:schemeClr val="accent1"/>
+          </a:effectRef>
+          <a:fontRef idx="minor">
+            <a:schemeClr val="lt1"/>
+          </a:fontRef>
+        </p:style>
+        <p:txBody>
+          <a:bodyPr rtlCol="0" anchor="ctr"/>
+          <a:lstStyle/>
+          <a:p>
+            <a:pPr algn="ctr"/>
+          </a:p>
+        </p:txBody>
+      </p:sp>
+      <p:sp>
+        <p:nvSpPr>
+          <p:cNvPr id="6" name="Rounded Rectangle 5"/>
+          <p:cNvSpPr/>
+          <p:nvPr/>
+        </p:nvSpPr>
+        <p:spPr>
+          <a:xfrm>
+            <a:off x="731520" y="1554480"/>
+            <a:ext cx="3474720" cy="4754880"/>
+          </a:xfrm>
+          <a:prstGeom prst="roundRect">
+            <a:avLst/>
+          </a:prstGeom>
+          <a:solidFill>
+            <a:srgbClr val="1E293B"/>
+          </a:solidFill>
+          <a:ln w="15240">
+            <a:solidFill>
+              <a:srgbClr val="334155"/>
+            </a:solidFill>
+          </a:ln>
+        </p:spPr>
+        <p:style>
+          <a:lnRef idx="1">
+            <a:schemeClr val="accent1"/>
+          </a:lnRef>
+          <a:fillRef idx="3">
+            <a:schemeClr val="accent1"/>
+          </a:fillRef>
+          <a:effectRef idx="2">
+            <a:schemeClr val="accent1"/>
+          </a:effectRef>
+          <a:fontRef idx="minor">
+            <a:schemeClr val="lt1"/>
+          </a:fontRef>
+        </p:style>
+        <p:txBody>
+          <a:bodyPr rtlCol="0" anchor="ctr"/>
+          <a:lstStyle/>
+          <a:p>
+            <a:pPr algn="ctr"/>
+          </a:p>
+        </p:txBody>
+      </p:sp>
+      <p:sp>
+        <p:nvSpPr>
+          <p:cNvPr id="7" name="TextBox 6"/>
+          <p:cNvSpPr txBox="1"/>
+          <p:nvPr/>
+        </p:nvSpPr>
+        <p:spPr>
+          <a:xfrm>
+            <a:off x="914400" y="1737360"/>
+            <a:ext cx="3108960" cy="4389120"/>
+          </a:xfrm>
+          <a:prstGeom prst="rect">
+            <a:avLst/>
+          </a:prstGeom>
+          <a:noFill/>
+        </p:spPr>
+        <p:txBody>
+          <a:bodyPr wrap="square">
+            <a:spAutoFit/>
+          </a:bodyPr>
+          <a:lstStyle/>
+          <a:p>
+            <a:pPr>
+              <a:spcAft>
+                <a:spcPts val="200"/>
+              </a:spcAft>
+              <a:defRPr sz="1100" b="1">
+                <a:solidFill>
+                  <a:srgbClr val="22C55E"/>
+                </a:solidFill>
+                <a:latin typeface="Segoe UI"/>
+              </a:defRPr>
+            </a:pPr>
+            <a:r>
+              <a:t>PHASE 1: PROTOTYPE (COMPLETED)</a:t>
+            </a:r>
+          </a:p>
+          <a:p>
+            <a:pPr>
+              <a:spcAft>
+                <a:spcPts val="1600"/>
+              </a:spcAft>
+              <a:defRPr sz="1700" b="1">
+                <a:solidFill>
+                  <a:srgbClr val="F8FAFC"/>
+                </a:solidFill>
+                <a:latin typeface="Segoe UI"/>
+              </a:defRPr>
+            </a:pPr>
+            <a:r>
+              <a:t>Hackathon Working MVP</a:t>
+            </a:r>
+          </a:p>
+          <a:p>
+            <a:pPr>
+              <a:spcAft>
+                <a:spcPts val="800"/>
+              </a:spcAft>
+              <a:defRPr sz="1200">
+                <a:solidFill>
+                  <a:srgbClr val="F8FAFC"/>
+                </a:solidFill>
+                <a:latin typeface="Segoe UI"/>
+              </a:defRPr>
+            </a:pPr>
+            <a:r>
+              <a:t>✔ Multi-agent Evolus orchestration</a:t>
+            </a:r>
+          </a:p>
+          <a:p>
+            <a:pPr>
+              <a:spcAft>
+                <a:spcPts val="800"/>
+              </a:spcAft>
+              <a:defRPr sz="1200">
+                <a:solidFill>
+                  <a:srgbClr val="F8FAFC"/>
+                </a:solidFill>
+                <a:latin typeface="Segoe UI"/>
+              </a:defRPr>
+            </a:pPr>
+            <a:r>
+              <a:t>✔ AMD Instinct MI300X vLLM backend</a:t>
+            </a:r>
+          </a:p>
+          <a:p>
+            <a:pPr>
+              <a:spcAft>
+                <a:spcPts val="800"/>
+              </a:spcAft>
+              <a:defRPr sz="1200">
+                <a:solidFill>
+                  <a:srgbClr val="F8FAFC"/>
+                </a:solidFill>
+                <a:latin typeface="Segoe UI"/>
+              </a:defRPr>
+            </a:pPr>
+            <a:r>
+              <a:t>✔ Evidence Gap &amp; Confidence Matrix</a:t>
+            </a:r>
+          </a:p>
+          <a:p>
+            <a:pPr>
+              <a:spcAft>
+                <a:spcPts val="800"/>
+              </a:spcAft>
+              <a:defRPr sz="1200">
+                <a:solidFill>
+                  <a:srgbClr val="F8FAFC"/>
+                </a:solidFill>
+                <a:latin typeface="Segoe UI"/>
+              </a:defRPr>
+            </a:pPr>
+            <a:r>
+              <a:t>✔ 3 Golden Clinical Scenarios tested</a:t>
+            </a:r>
+          </a:p>
+          <a:p>
+            <a:pPr>
+              <a:spcAft>
+                <a:spcPts val="800"/>
+              </a:spcAft>
+              <a:defRPr sz="1200">
+                <a:solidFill>
+                  <a:srgbClr val="F8FAFC"/>
+                </a:solidFill>
+                <a:latin typeface="Segoe UI"/>
+              </a:defRPr>
+            </a:pPr>
+            <a:r>
+              <a:t>✔ Multilingual Patient summaries</a:t>
+            </a:r>
+          </a:p>
+          <a:p>
+            <a:pPr>
+              <a:spcAft>
+                <a:spcPts val="800"/>
+              </a:spcAft>
+              <a:defRPr sz="1200">
+                <a:solidFill>
+                  <a:srgbClr val="F8FAFC"/>
+                </a:solidFill>
+                <a:latin typeface="Segoe UI"/>
+              </a:defRPr>
+            </a:pPr>
+            <a:r>
+              <a:t>✔ RBAC: Doctor, Patient, Lab Portals</a:t>
+            </a:r>
+          </a:p>
+        </p:txBody>
+      </p:sp>
+      <p:sp>
+        <p:nvSpPr>
+          <p:cNvPr id="8" name="Rounded Rectangle 7"/>
+          <p:cNvSpPr/>
+          <p:nvPr/>
+        </p:nvSpPr>
+        <p:spPr>
+          <a:xfrm>
+            <a:off x="4361688" y="1554480"/>
+            <a:ext cx="3474720" cy="4754880"/>
+          </a:xfrm>
+          <a:prstGeom prst="roundRect">
+            <a:avLst/>
+          </a:prstGeom>
+          <a:solidFill>
+            <a:srgbClr val="1E293B"/>
+          </a:solidFill>
+          <a:ln w="15240">
+            <a:solidFill>
+              <a:srgbClr val="334155"/>
+            </a:solidFill>
+          </a:ln>
+        </p:spPr>
+        <p:style>
+          <a:lnRef idx="1">
+            <a:schemeClr val="accent1"/>
+          </a:lnRef>
+          <a:fillRef idx="3">
+            <a:schemeClr val="accent1"/>
+          </a:fillRef>
+          <a:effectRef idx="2">
+            <a:schemeClr val="accent1"/>
+          </a:effectRef>
+          <a:fontRef idx="minor">
+            <a:schemeClr val="lt1"/>
+          </a:fontRef>
+        </p:style>
+        <p:txBody>
+          <a:bodyPr rtlCol="0" anchor="ctr"/>
+          <a:lstStyle/>
+          <a:p>
+            <a:pPr algn="ctr"/>
+          </a:p>
+        </p:txBody>
+      </p:sp>
+      <p:sp>
+        <p:nvSpPr>
+          <p:cNvPr id="9" name="TextBox 8"/>
+          <p:cNvSpPr txBox="1"/>
+          <p:nvPr/>
+        </p:nvSpPr>
+        <p:spPr>
+          <a:xfrm>
+            <a:off x="4544568" y="1737360"/>
+            <a:ext cx="3108960" cy="4389120"/>
+          </a:xfrm>
+          <a:prstGeom prst="rect">
+            <a:avLst/>
+          </a:prstGeom>
+          <a:noFill/>
+        </p:spPr>
+        <p:txBody>
+          <a:bodyPr wrap="square">
+            <a:spAutoFit/>
+          </a:bodyPr>
+          <a:lstStyle/>
+          <a:p>
+            <a:pPr>
+              <a:spcAft>
+                <a:spcPts val="200"/>
+              </a:spcAft>
+              <a:defRPr sz="1100" b="1">
+                <a:solidFill>
+                  <a:srgbClr val="06B6D4"/>
+                </a:solidFill>
+                <a:latin typeface="Segoe UI"/>
+              </a:defRPr>
+            </a:pPr>
+            <a:r>
+              <a:t>PHASE 2: PILOT (Q1 2027)</a:t>
+            </a:r>
+          </a:p>
+          <a:p>
+            <a:pPr>
+              <a:spcAft>
+                <a:spcPts val="1600"/>
+              </a:spcAft>
+              <a:defRPr sz="1700" b="1">
+                <a:solidFill>
+                  <a:srgbClr val="F8FAFC"/>
+                </a:solidFill>
+                <a:latin typeface="Segoe UI"/>
+              </a:defRPr>
+            </a:pPr>
+            <a:r>
+              <a:t>EHR &amp; Clearinghouse Integration</a:t>
+            </a:r>
+          </a:p>
+          <a:p>
+            <a:pPr>
+              <a:spcAft>
+                <a:spcPts val="800"/>
+              </a:spcAft>
+              <a:defRPr sz="1200">
+                <a:solidFill>
+                  <a:srgbClr val="94A3B8"/>
+                </a:solidFill>
+                <a:latin typeface="Segoe UI"/>
+              </a:defRPr>
+            </a:pPr>
+            <a:r>
+              <a:t>• FHIR &amp; HL7 v2 connectors (Epic / Cerner)</a:t>
+            </a:r>
+          </a:p>
+          <a:p>
+            <a:pPr>
+              <a:spcAft>
+                <a:spcPts val="800"/>
+              </a:spcAft>
+              <a:defRPr sz="1200">
+                <a:solidFill>
+                  <a:srgbClr val="94A3B8"/>
+                </a:solidFill>
+                <a:latin typeface="Segoe UI"/>
+              </a:defRPr>
+            </a:pPr>
+            <a:r>
+              <a:t>• Direct EDI 278 real-time payer clearinghouse</a:t>
+            </a:r>
+          </a:p>
+          <a:p>
+            <a:pPr>
+              <a:spcAft>
+                <a:spcPts val="800"/>
+              </a:spcAft>
+              <a:defRPr sz="1200">
+                <a:solidFill>
+                  <a:srgbClr val="94A3B8"/>
+                </a:solidFill>
+                <a:latin typeface="Segoe UI"/>
+              </a:defRPr>
+            </a:pPr>
+            <a:r>
+              <a:t>• Automated clinical fax ingestion via OCR</a:t>
+            </a:r>
+          </a:p>
+          <a:p>
+            <a:pPr>
+              <a:spcAft>
+                <a:spcPts val="800"/>
+              </a:spcAft>
+              <a:defRPr sz="1200">
+                <a:solidFill>
+                  <a:srgbClr val="94A3B8"/>
+                </a:solidFill>
+                <a:latin typeface="Segoe UI"/>
+              </a:defRPr>
+            </a:pPr>
+            <a:r>
+              <a:t>• Nurse review queue Slack/Teams webhooks</a:t>
+            </a:r>
+          </a:p>
+          <a:p>
+            <a:pPr>
+              <a:spcAft>
+                <a:spcPts val="800"/>
+              </a:spcAft>
+              <a:defRPr sz="1200">
+                <a:solidFill>
+                  <a:srgbClr val="94A3B8"/>
+                </a:solidFill>
+                <a:latin typeface="Segoe UI"/>
+              </a:defRPr>
+            </a:pPr>
+            <a:r>
+              <a:t>• On-premise AMD ROCm appliance deployment</a:t>
+            </a:r>
+          </a:p>
+        </p:txBody>
+      </p:sp>
+      <p:sp>
+        <p:nvSpPr>
+          <p:cNvPr id="10" name="Rounded Rectangle 9"/>
+          <p:cNvSpPr/>
+          <p:nvPr/>
+        </p:nvSpPr>
+        <p:spPr>
+          <a:xfrm>
+            <a:off x="7991856" y="1554480"/>
+            <a:ext cx="3474720" cy="4754880"/>
+          </a:xfrm>
+          <a:prstGeom prst="roundRect">
+            <a:avLst/>
+          </a:prstGeom>
+          <a:solidFill>
+            <a:srgbClr val="1E293B"/>
+          </a:solidFill>
+          <a:ln w="15240">
+            <a:solidFill>
+              <a:srgbClr val="334155"/>
+            </a:solidFill>
+          </a:ln>
+        </p:spPr>
+        <p:style>
+          <a:lnRef idx="1">
+            <a:schemeClr val="accent1"/>
+          </a:lnRef>
+          <a:fillRef idx="3">
+            <a:schemeClr val="accent1"/>
+          </a:fillRef>
+          <a:effectRef idx="2">
+            <a:schemeClr val="accent1"/>
+          </a:effectRef>
+          <a:fontRef idx="minor">
+            <a:schemeClr val="lt1"/>
+          </a:fontRef>
+        </p:style>
+        <p:txBody>
+          <a:bodyPr rtlCol="0" anchor="ctr"/>
+          <a:lstStyle/>
+          <a:p>
+            <a:pPr algn="ctr"/>
+          </a:p>
+        </p:txBody>
+      </p:sp>
+      <p:sp>
+        <p:nvSpPr>
+          <p:cNvPr id="11" name="TextBox 10"/>
+          <p:cNvSpPr txBox="1"/>
+          <p:nvPr/>
+        </p:nvSpPr>
+        <p:spPr>
+          <a:xfrm>
+            <a:off x="8174736" y="1737360"/>
+            <a:ext cx="3108960" cy="4389120"/>
+          </a:xfrm>
+          <a:prstGeom prst="rect">
+            <a:avLst/>
+          </a:prstGeom>
+          <a:noFill/>
+        </p:spPr>
+        <p:txBody>
+          <a:bodyPr wrap="square">
+            <a:spAutoFit/>
+          </a:bodyPr>
+          <a:lstStyle/>
+          <a:p>
+            <a:pPr>
+              <a:spcAft>
+                <a:spcPts val="200"/>
+              </a:spcAft>
+              <a:defRPr sz="1100" b="1">
+                <a:solidFill>
+                  <a:srgbClr val="A855F7"/>
+                </a:solidFill>
+                <a:latin typeface="Segoe UI"/>
+              </a:defRPr>
+            </a:pPr>
+            <a:r>
+              <a:t>PHASE 3: SCALE (Q3 2027)</a:t>
+            </a:r>
+          </a:p>
+          <a:p>
+            <a:pPr>
+              <a:spcAft>
+                <a:spcPts val="1600"/>
+              </a:spcAft>
+              <a:defRPr sz="1700" b="1">
+                <a:solidFill>
+                  <a:srgbClr val="F8FAFC"/>
+                </a:solidFill>
+                <a:latin typeface="Segoe UI"/>
+              </a:defRPr>
+            </a:pPr>
+            <a:r>
+              <a:t>Full Autonomous Health Network</a:t>
+            </a:r>
+          </a:p>
+          <a:p>
+            <a:pPr>
+              <a:spcAft>
+                <a:spcPts val="800"/>
+              </a:spcAft>
+              <a:defRPr sz="1200">
+                <a:solidFill>
+                  <a:srgbClr val="94A3B8"/>
+                </a:solidFill>
+                <a:latin typeface="Segoe UI"/>
+              </a:defRPr>
+            </a:pPr>
+            <a:r>
+              <a:t>• Multi-specialty coverage (Oncology, Cardiology)</a:t>
+            </a:r>
+          </a:p>
+          <a:p>
+            <a:pPr>
+              <a:spcAft>
+                <a:spcPts val="800"/>
+              </a:spcAft>
+              <a:defRPr sz="1200">
+                <a:solidFill>
+                  <a:srgbClr val="94A3B8"/>
+                </a:solidFill>
+                <a:latin typeface="Segoe UI"/>
+              </a:defRPr>
+            </a:pPr>
+            <a:r>
+              <a:t>• Predictive Payer Denial analytics</a:t>
+            </a:r>
+          </a:p>
+          <a:p>
+            <a:pPr>
+              <a:spcAft>
+                <a:spcPts val="800"/>
+              </a:spcAft>
+              <a:defRPr sz="1200">
+                <a:solidFill>
+                  <a:srgbClr val="94A3B8"/>
+                </a:solidFill>
+                <a:latin typeface="Segoe UI"/>
+              </a:defRPr>
+            </a:pPr>
+            <a:r>
+              <a:t>• Cross-hospital federated learning on AMD</a:t>
+            </a:r>
+          </a:p>
+          <a:p>
+            <a:pPr>
+              <a:spcAft>
+                <a:spcPts val="800"/>
+              </a:spcAft>
+              <a:defRPr sz="1200">
+                <a:solidFill>
+                  <a:srgbClr val="94A3B8"/>
+                </a:solidFill>
+                <a:latin typeface="Segoe UI"/>
+              </a:defRPr>
+            </a:pPr>
+            <a:r>
+              <a:t>• Direct-to-patient mobile notification app</a:t>
+            </a:r>
+          </a:p>
+          <a:p>
+            <a:pPr>
+              <a:spcAft>
+                <a:spcPts val="800"/>
+              </a:spcAft>
+              <a:defRPr sz="1200">
+                <a:solidFill>
+                  <a:srgbClr val="94A3B8"/>
+                </a:solidFill>
+                <a:latin typeface="Segoe UI"/>
+              </a:defRPr>
+            </a:pPr>
+            <a:r>
+              <a:t>• Global payer guideline synchronization</a:t>
+            </a:r>
+          </a:p>
+        </p:txBody>
+      </p:sp>
+    </p:spTree>
+  </p:cSld>
+  <p:clrMapOvr>
+    <a:masterClrMapping/>
+  </p:clrMapOvr>
+</p:sld>
+</file>
+
+<file path=ppt/slides/slide14.xml><?xml version="1.0" encoding="utf-8"?>
+<p:sld xmlns:a="http://schemas.openxmlformats.org/drawingml/2006/main" xmlns:p="http://schemas.openxmlformats.org/presentationml/2006/main" xmlns:r="http://schemas.openxmlformats.org/officeDocument/2006/relationships">
+  <p:cSld>
+    <p:spTree>
+      <p:nvGrpSpPr>
+        <p:cNvPr id="1" name=""/>
+        <p:cNvGrpSpPr/>
+        <p:nvPr/>
+      </p:nvGrpSpPr>
+      <p:grpSpPr/>
+      <p:sp>
+        <p:nvSpPr>
+          <p:cNvPr id="2" name="Rectangle 1"/>
+          <p:cNvSpPr/>
+          <p:nvPr/>
+        </p:nvSpPr>
+        <p:spPr>
+          <a:xfrm>
+            <a:off x="0" y="0"/>
+            <a:ext cx="12191695" cy="6858000"/>
+          </a:xfrm>
+          <a:prstGeom prst="rect">
+            <a:avLst/>
+          </a:prstGeom>
+          <a:solidFill>
+            <a:srgbClr val="0F172A"/>
+          </a:solidFill>
+          <a:ln>
+            <a:noFill/>
+          </a:ln>
+        </p:spPr>
+        <p:style>
+          <a:lnRef idx="1">
+            <a:schemeClr val="accent1"/>
+          </a:lnRef>
+          <a:fillRef idx="3">
+            <a:schemeClr val="accent1"/>
+          </a:fillRef>
+          <a:effectRef idx="2">
+            <a:schemeClr val="accent1"/>
+          </a:effectRef>
+          <a:fontRef idx="minor">
+            <a:schemeClr val="lt1"/>
+          </a:fontRef>
+        </p:style>
+        <p:txBody>
+          <a:bodyPr rtlCol="0" anchor="ctr"/>
+          <a:lstStyle/>
+          <a:p>
+            <a:pPr algn="ctr"/>
+          </a:p>
+        </p:txBody>
+      </p:sp>
+      <p:sp>
+        <p:nvSpPr>
+          <p:cNvPr id="3" name="TextBox 2"/>
+          <p:cNvSpPr txBox="1"/>
+          <p:nvPr/>
+        </p:nvSpPr>
+        <p:spPr>
+          <a:xfrm>
+            <a:off x="731520" y="365760"/>
+            <a:ext cx="10728655" cy="320040"/>
+          </a:xfrm>
+          <a:prstGeom prst="rect">
+            <a:avLst/>
+          </a:prstGeom>
+          <a:noFill/>
+        </p:spPr>
+        <p:txBody>
+          <a:bodyPr wrap="square">
+            <a:spAutoFit/>
+          </a:bodyPr>
+          <a:lstStyle/>
+          <a:p>
+            <a:pPr>
+              <a:defRPr sz="1000" b="1">
+                <a:solidFill>
+                  <a:srgbClr val="ED1C24"/>
+                </a:solidFill>
+                <a:latin typeface="Segoe UI"/>
+              </a:defRPr>
+            </a:pPr>
+            <a:r>
               <a:t>CONCLUSION  •  TRACK 2: HEALTH &amp; WELLBEING | EVOLUS ON AMD</a:t>
             </a:r>
           </a:p>
@@ -9431,7 +10932,7 @@
               </a:defRPr>
             </a:pPr>
             <a:r>
-              <a:t>CLINICAL SAFETY &amp; ETHICS  •  TRACK 2: HEALTH &amp; WELLBEING | EVOLUS ON AMD</a:t>
+              <a:t>HEALTHCARE WORKFLOW INTEGRATION  •  TRACK 2: HEALTH &amp; WELLBEING | EVOLUS ON AMD</a:t>
             </a:r>
           </a:p>
         </p:txBody>
@@ -9467,7 +10968,7 @@
               </a:defRPr>
             </a:pPr>
             <a:r>
-              <a:t>Making Uncertainty Visible: The Clinical Confidence Matrix</a:t>
+              <a:t>Enterprise Role-Based Access Control (RBAC)</a:t>
             </a:r>
           </a:p>
         </p:txBody>
@@ -9523,8 +11024,8 @@
         </p:nvSpPr>
         <p:spPr>
           <a:xfrm>
-            <a:off x="731520" y="1554480"/>
-            <a:ext cx="5266944" cy="4754880"/>
+            <a:off x="731520" y="1645920"/>
+            <a:ext cx="2560320" cy="4389120"/>
           </a:xfrm>
           <a:prstGeom prst="roundRect">
             <a:avLst/>
@@ -9568,8 +11069,8 @@
         </p:nvSpPr>
         <p:spPr>
           <a:xfrm>
-            <a:off x="1005840" y="1737360"/>
-            <a:ext cx="4718304" cy="4389120"/>
+            <a:off x="868680" y="1828800"/>
+            <a:ext cx="2286000" cy="4023360"/>
           </a:xfrm>
           <a:prstGeom prst="rect">
             <a:avLst/>
@@ -9584,25 +11085,57 @@
           <a:p>
             <a:pPr>
               <a:spcAft>
+                <a:spcPts val="400"/>
+              </a:spcAft>
+              <a:defRPr sz="1100" b="1">
+                <a:solidFill>
+                  <a:srgbClr val="14B8A6"/>
+                </a:solidFill>
+                <a:latin typeface="Segoe UI"/>
+              </a:defRPr>
+            </a:pPr>
+            <a:r>
+              <a:t>COORDINATOR PORTAL</a:t>
+            </a:r>
+          </a:p>
+          <a:p>
+            <a:pPr>
+              <a:spcAft>
+                <a:spcPts val="1200"/>
+              </a:spcAft>
+              <a:defRPr sz="1500" b="1">
+                <a:solidFill>
+                  <a:srgbClr val="F8FAFC"/>
+                </a:solidFill>
+                <a:latin typeface="Segoe UI"/>
+              </a:defRPr>
+            </a:pPr>
+            <a:r>
+              <a:t>Deepak Kannan (Prior-Auth Lead)</a:t>
+            </a:r>
+          </a:p>
+          <a:p>
+            <a:pPr>
+              <a:spcAft>
+                <a:spcPts val="1600"/>
+              </a:spcAft>
+              <a:defRPr sz="1100">
+                <a:solidFill>
+                  <a:srgbClr val="94A3B8"/>
+                </a:solidFill>
+                <a:latin typeface="Segoe UI"/>
+              </a:defRPr>
+            </a:pPr>
+            <a:r>
+              <a:t>Full AI Cockpit, case intake, multi-agent trigger, Evidence Gap Matrix, CMS-1500 packet generator, and nurse escalation queue.</a:t>
+            </a:r>
+          </a:p>
+          <a:p>
+            <a:pPr>
+              <a:spcAft>
                 <a:spcPts val="600"/>
               </a:spcAft>
-              <a:defRPr sz="1400" b="1">
-                <a:solidFill>
-                  <a:srgbClr val="EAB308"/>
-                </a:solidFill>
-                <a:latin typeface="Segoe UI"/>
-              </a:defRPr>
-            </a:pPr>
-            <a:r>
-              <a:t>EVIDENCE GAP &amp; CONFIDENCE TIERS</a:t>
-            </a:r>
-          </a:p>
-          <a:p>
-            <a:pPr>
-              <a:spcAft>
-                <a:spcPts val="1400"/>
-              </a:spcAft>
-              <a:defRPr sz="1800" b="1">
+              <a:defRPr sz="1000" b="1">
                 <a:solidFill>
                   <a:srgbClr val="F8FAFC"/>
                 </a:solidFill>
@@ -9610,31 +11143,15 @@
               </a:defRPr>
             </a:pPr>
             <a:r>
-              <a:t>Eliminating Hallucinations in Patient Care</a:t>
-            </a:r>
-          </a:p>
-          <a:p>
-            <a:pPr>
-              <a:spcAft>
-                <a:spcPts val="200"/>
-              </a:spcAft>
-              <a:defRPr sz="1200" b="1">
-                <a:solidFill>
-                  <a:srgbClr val="22C55E"/>
-                </a:solidFill>
-                <a:latin typeface="Segoe UI"/>
-              </a:defRPr>
-            </a:pPr>
-            <a:r>
-              <a:t>■  GREEN TIER (&gt;= 90% Confidence)</a:t>
-            </a:r>
-          </a:p>
-          <a:p>
-            <a:pPr>
-              <a:spcAft>
-                <a:spcPts val="800"/>
-              </a:spcAft>
-              <a:defRPr sz="1100">
+              <a:t>HEALTHCARE IMPACT:</a:t>
+            </a:r>
+          </a:p>
+          <a:p>
+            <a:pPr>
+              <a:spcAft>
+                <a:spcPts val="400"/>
+              </a:spcAft>
+              <a:defRPr sz="1000">
                 <a:solidFill>
                   <a:srgbClr val="94A3B8"/>
                 </a:solidFill>
@@ -9642,31 +11159,15 @@
               </a:defRPr>
             </a:pPr>
             <a:r>
-              <a:t>Clean Auto-Approval: All policy clauses matched with unambiguous EHR proof (e.g., MRI tears, 6+ months PT). Instant electronic packet generation.</a:t>
-            </a:r>
-          </a:p>
-          <a:p>
-            <a:pPr>
-              <a:spcAft>
-                <a:spcPts val="200"/>
-              </a:spcAft>
-              <a:defRPr sz="1200" b="1">
-                <a:solidFill>
-                  <a:srgbClr val="EAB308"/>
-                </a:solidFill>
-                <a:latin typeface="Segoe UI"/>
-              </a:defRPr>
-            </a:pPr>
-            <a:r>
-              <a:t>■  YELLOW TIER (70% - 89% Confidence)</a:t>
-            </a:r>
-          </a:p>
-          <a:p>
-            <a:pPr>
-              <a:spcAft>
-                <a:spcPts val="800"/>
-              </a:spcAft>
-              <a:defRPr sz="1100">
+              <a:t>• 98.6% faster prep</a:t>
+            </a:r>
+          </a:p>
+          <a:p>
+            <a:pPr>
+              <a:spcAft>
+                <a:spcPts val="400"/>
+              </a:spcAft>
+              <a:defRPr sz="1000">
                 <a:solidFill>
                   <a:srgbClr val="94A3B8"/>
                 </a:solidFill>
@@ -9674,31 +11175,15 @@
               </a:defRPr>
             </a:pPr>
             <a:r>
-              <a:t>Uncertainty Escalation: Partial evidence or missing step-therapy detected. System stops auto-approval, highlights exact missing proof, and routes to Nurse Review Queue.</a:t>
-            </a:r>
-          </a:p>
-          <a:p>
-            <a:pPr>
-              <a:spcAft>
-                <a:spcPts val="200"/>
-              </a:spcAft>
-              <a:defRPr sz="1200" b="1">
-                <a:solidFill>
-                  <a:srgbClr val="ED1C24"/>
-                </a:solidFill>
-                <a:latin typeface="Segoe UI"/>
-              </a:defRPr>
-            </a:pPr>
-            <a:r>
-              <a:t>■  RED TIER (&lt; 70% Confidence)</a:t>
-            </a:r>
-          </a:p>
-          <a:p>
-            <a:pPr>
-              <a:spcAft>
-                <a:spcPts val="800"/>
-              </a:spcAft>
-              <a:defRPr sz="1100">
+              <a:t>• Unified clinical queue</a:t>
+            </a:r>
+          </a:p>
+          <a:p>
+            <a:pPr>
+              <a:spcAft>
+                <a:spcPts val="400"/>
+              </a:spcAft>
+              <a:defRPr sz="1000">
                 <a:solidFill>
                   <a:srgbClr val="94A3B8"/>
                 </a:solidFill>
@@ -9706,7 +11191,7 @@
               </a:defRPr>
             </a:pPr>
             <a:r>
-              <a:t>Definite Policy Discrepancy: Contradiction found or therapy contraindicated. Autonomous drafting of cited appeal letter or recommended alternative pathway.</a:t>
+              <a:t>• Zero faxing needed</a:t>
             </a:r>
           </a:p>
         </p:txBody>
@@ -9719,8 +11204,8 @@
         </p:nvSpPr>
         <p:spPr>
           <a:xfrm>
-            <a:off x="6190488" y="1554480"/>
-            <a:ext cx="5266944" cy="4754880"/>
+            <a:off x="3456432" y="1645920"/>
+            <a:ext cx="2560320" cy="4389120"/>
           </a:xfrm>
           <a:prstGeom prst="roundRect">
             <a:avLst/>
@@ -9764,8 +11249,8 @@
         </p:nvSpPr>
         <p:spPr>
           <a:xfrm>
-            <a:off x="6464808" y="1737360"/>
-            <a:ext cx="4718304" cy="4389120"/>
+            <a:off x="3593592" y="1828800"/>
+            <a:ext cx="2286000" cy="4023360"/>
           </a:xfrm>
           <a:prstGeom prst="rect">
             <a:avLst/>
@@ -9780,25 +11265,57 @@
           <a:p>
             <a:pPr>
               <a:spcAft>
+                <a:spcPts val="400"/>
+              </a:spcAft>
+              <a:defRPr sz="1100" b="1">
+                <a:solidFill>
+                  <a:srgbClr val="06B6D4"/>
+                </a:solidFill>
+                <a:latin typeface="Segoe UI"/>
+              </a:defRPr>
+            </a:pPr>
+            <a:r>
+              <a:t>DOCTOR PORTAL</a:t>
+            </a:r>
+          </a:p>
+          <a:p>
+            <a:pPr>
+              <a:spcAft>
+                <a:spcPts val="1200"/>
+              </a:spcAft>
+              <a:defRPr sz="1500" b="1">
+                <a:solidFill>
+                  <a:srgbClr val="F8FAFC"/>
+                </a:solidFill>
+                <a:latin typeface="Segoe UI"/>
+              </a:defRPr>
+            </a:pPr>
+            <a:r>
+              <a:t>Dr. Aris Thorne, MD (Attending)</a:t>
+            </a:r>
+          </a:p>
+          <a:p>
+            <a:pPr>
+              <a:spcAft>
+                <a:spcPts val="1600"/>
+              </a:spcAft>
+              <a:defRPr sz="1100">
+                <a:solidFill>
+                  <a:srgbClr val="94A3B8"/>
+                </a:solidFill>
+                <a:latin typeface="Segoe UI"/>
+              </a:defRPr>
+            </a:pPr>
+            <a:r>
+              <a:t>Physician sign-off queue, clause evidence review, clinical override annotations, and 1-Click Electronic Signature transmission.</a:t>
+            </a:r>
+          </a:p>
+          <a:p>
+            <a:pPr>
+              <a:spcAft>
                 <a:spcPts val="600"/>
               </a:spcAft>
-              <a:defRPr sz="1400" b="1">
-                <a:solidFill>
-                  <a:srgbClr val="06B6D4"/>
-                </a:solidFill>
-                <a:latin typeface="Segoe UI"/>
-              </a:defRPr>
-            </a:pPr>
-            <a:r>
-              <a:t>HUMAN-IN-THE-LOOP CONTROL</a:t>
-            </a:r>
-          </a:p>
-          <a:p>
-            <a:pPr>
-              <a:spcAft>
-                <a:spcPts val="1400"/>
-              </a:spcAft>
-              <a:defRPr sz="1800" b="1">
+              <a:defRPr sz="1000" b="1">
                 <a:solidFill>
                   <a:srgbClr val="F8FAFC"/>
                 </a:solidFill>
@@ -9806,79 +11323,415 @@
               </a:defRPr>
             </a:pPr>
             <a:r>
-              <a:t>Doctors Always Hold the Final Sign-Off</a:t>
-            </a:r>
-          </a:p>
-          <a:p>
-            <a:pPr>
-              <a:spcAft>
-                <a:spcPts val="1000"/>
-              </a:spcAft>
-              <a:defRPr sz="1200" b="1">
-                <a:solidFill>
-                  <a:srgbClr val="14B8A6"/>
-                </a:solidFill>
-                <a:latin typeface="Segoe UI"/>
-              </a:defRPr>
-            </a:pPr>
-            <a:r>
-              <a:t>✔  Actionable Remediation Guidance: </a:t>
-            </a:r>
-            <a:r>
-              <a:rPr b="0">
+              <a:t>HEALTHCARE IMPACT:</a:t>
+            </a:r>
+          </a:p>
+          <a:p>
+            <a:pPr>
+              <a:spcAft>
+                <a:spcPts val="400"/>
+              </a:spcAft>
+              <a:defRPr sz="1000">
                 <a:solidFill>
                   <a:srgbClr val="94A3B8"/>
                 </a:solidFill>
-              </a:rPr>
-              <a:t>Instead of a generic denial, the agent tells the clinic nurse: 'Upload proof of 3-month Methotrexate trial to achieve 95% approval.'</a:t>
-            </a:r>
-          </a:p>
-          <a:p>
-            <a:pPr>
-              <a:spcAft>
-                <a:spcPts val="1000"/>
-              </a:spcAft>
-              <a:defRPr sz="1200" b="1">
-                <a:solidFill>
-                  <a:srgbClr val="14B8A6"/>
-                </a:solidFill>
-                <a:latin typeface="Segoe UI"/>
-              </a:defRPr>
-            </a:pPr>
-            <a:r>
-              <a:t>✔  1-Click Physician Electronic Signature: </a:t>
-            </a:r>
-            <a:r>
-              <a:rPr b="0">
+                <a:latin typeface="Segoe UI"/>
+              </a:defRPr>
+            </a:pPr>
+            <a:r>
+              <a:t>• 1-Click legal sign</a:t>
+            </a:r>
+          </a:p>
+          <a:p>
+            <a:pPr>
+              <a:spcAft>
+                <a:spcPts val="400"/>
+              </a:spcAft>
+              <a:defRPr sz="1000">
                 <a:solidFill>
                   <a:srgbClr val="94A3B8"/>
                 </a:solidFill>
-              </a:rPr>
-              <a:t>The attending doctor reviews the highlighted clinical evidence and signs electronically with one click.</a:t>
-            </a:r>
-          </a:p>
-          <a:p>
-            <a:pPr>
-              <a:spcAft>
-                <a:spcPts val="1000"/>
-              </a:spcAft>
-              <a:defRPr sz="1200" b="1">
-                <a:solidFill>
-                  <a:srgbClr val="14B8A6"/>
-                </a:solidFill>
-                <a:latin typeface="Segoe UI"/>
-              </a:defRPr>
-            </a:pPr>
-            <a:r>
-              <a:t>✔  Immutable Audit Trail: </a:t>
-            </a:r>
-            <a:r>
-              <a:rPr b="0">
+                <a:latin typeface="Segoe UI"/>
+              </a:defRPr>
+            </a:pPr>
+            <a:r>
+              <a:t>• Audit compliance</a:t>
+            </a:r>
+          </a:p>
+          <a:p>
+            <a:pPr>
+              <a:spcAft>
+                <a:spcPts val="400"/>
+              </a:spcAft>
+              <a:defRPr sz="1000">
                 <a:solidFill>
                   <a:srgbClr val="94A3B8"/>
                 </a:solidFill>
-              </a:rPr>
-              <a:t>Every agent decision, prompt trace, token speed, and human edit is permanently logged for HIPAA compliance and payer scrutiny.</a:t>
+                <a:latin typeface="Segoe UI"/>
+              </a:defRPr>
+            </a:pPr>
+            <a:r>
+              <a:t>• Full physician control</a:t>
+            </a:r>
+          </a:p>
+        </p:txBody>
+      </p:sp>
+      <p:sp>
+        <p:nvSpPr>
+          <p:cNvPr id="10" name="Rounded Rectangle 9"/>
+          <p:cNvSpPr/>
+          <p:nvPr/>
+        </p:nvSpPr>
+        <p:spPr>
+          <a:xfrm>
+            <a:off x="6181344" y="1645920"/>
+            <a:ext cx="2560320" cy="4389120"/>
+          </a:xfrm>
+          <a:prstGeom prst="roundRect">
+            <a:avLst/>
+          </a:prstGeom>
+          <a:solidFill>
+            <a:srgbClr val="1E293B"/>
+          </a:solidFill>
+          <a:ln w="15240">
+            <a:solidFill>
+              <a:srgbClr val="334155"/>
+            </a:solidFill>
+          </a:ln>
+        </p:spPr>
+        <p:style>
+          <a:lnRef idx="1">
+            <a:schemeClr val="accent1"/>
+          </a:lnRef>
+          <a:fillRef idx="3">
+            <a:schemeClr val="accent1"/>
+          </a:fillRef>
+          <a:effectRef idx="2">
+            <a:schemeClr val="accent1"/>
+          </a:effectRef>
+          <a:fontRef idx="minor">
+            <a:schemeClr val="lt1"/>
+          </a:fontRef>
+        </p:style>
+        <p:txBody>
+          <a:bodyPr rtlCol="0" anchor="ctr"/>
+          <a:lstStyle/>
+          <a:p>
+            <a:pPr algn="ctr"/>
+          </a:p>
+        </p:txBody>
+      </p:sp>
+      <p:sp>
+        <p:nvSpPr>
+          <p:cNvPr id="11" name="TextBox 10"/>
+          <p:cNvSpPr txBox="1"/>
+          <p:nvPr/>
+        </p:nvSpPr>
+        <p:spPr>
+          <a:xfrm>
+            <a:off x="6318504" y="1828800"/>
+            <a:ext cx="2286000" cy="4023360"/>
+          </a:xfrm>
+          <a:prstGeom prst="rect">
+            <a:avLst/>
+          </a:prstGeom>
+          <a:noFill/>
+        </p:spPr>
+        <p:txBody>
+          <a:bodyPr wrap="square">
+            <a:spAutoFit/>
+          </a:bodyPr>
+          <a:lstStyle/>
+          <a:p>
+            <a:pPr>
+              <a:spcAft>
+                <a:spcPts val="400"/>
+              </a:spcAft>
+              <a:defRPr sz="1100" b="1">
+                <a:solidFill>
+                  <a:srgbClr val="A855F7"/>
+                </a:solidFill>
+                <a:latin typeface="Segoe UI"/>
+              </a:defRPr>
+            </a:pPr>
+            <a:r>
+              <a:t>PATIENT PORTAL</a:t>
+            </a:r>
+          </a:p>
+          <a:p>
+            <a:pPr>
+              <a:spcAft>
+                <a:spcPts val="1200"/>
+              </a:spcAft>
+              <a:defRPr sz="1500" b="1">
+                <a:solidFill>
+                  <a:srgbClr val="F8FAFC"/>
+                </a:solidFill>
+                <a:latin typeface="Segoe UI"/>
+              </a:defRPr>
+            </a:pPr>
+            <a:r>
+              <a:t>Eleanor Vance (Patient View)</a:t>
+            </a:r>
+          </a:p>
+          <a:p>
+            <a:pPr>
+              <a:spcAft>
+                <a:spcPts val="1600"/>
+              </a:spcAft>
+              <a:defRPr sz="1100">
+                <a:solidFill>
+                  <a:srgbClr val="94A3B8"/>
+                </a:solidFill>
+                <a:latin typeface="Segoe UI"/>
+              </a:defRPr>
+            </a:pPr>
+            <a:r>
+              <a:t>Transparent coverage status, 6th-grade plain language explanation, multilingual translations (EN, ES, HI), and out-of-pocket estimates.</a:t>
+            </a:r>
+          </a:p>
+          <a:p>
+            <a:pPr>
+              <a:spcAft>
+                <a:spcPts val="600"/>
+              </a:spcAft>
+              <a:defRPr sz="1000" b="1">
+                <a:solidFill>
+                  <a:srgbClr val="F8FAFC"/>
+                </a:solidFill>
+                <a:latin typeface="Segoe UI"/>
+              </a:defRPr>
+            </a:pPr>
+            <a:r>
+              <a:t>HEALTHCARE IMPACT:</a:t>
+            </a:r>
+          </a:p>
+          <a:p>
+            <a:pPr>
+              <a:spcAft>
+                <a:spcPts val="400"/>
+              </a:spcAft>
+              <a:defRPr sz="1000">
+                <a:solidFill>
+                  <a:srgbClr val="94A3B8"/>
+                </a:solidFill>
+                <a:latin typeface="Segoe UI"/>
+              </a:defRPr>
+            </a:pPr>
+            <a:r>
+              <a:t>• Health equity focus</a:t>
+            </a:r>
+          </a:p>
+          <a:p>
+            <a:pPr>
+              <a:spcAft>
+                <a:spcPts val="400"/>
+              </a:spcAft>
+              <a:defRPr sz="1000">
+                <a:solidFill>
+                  <a:srgbClr val="94A3B8"/>
+                </a:solidFill>
+                <a:latin typeface="Segoe UI"/>
+              </a:defRPr>
+            </a:pPr>
+            <a:r>
+              <a:t>• Plain 6th-grade summary</a:t>
+            </a:r>
+          </a:p>
+          <a:p>
+            <a:pPr>
+              <a:spcAft>
+                <a:spcPts val="400"/>
+              </a:spcAft>
+              <a:defRPr sz="1000">
+                <a:solidFill>
+                  <a:srgbClr val="94A3B8"/>
+                </a:solidFill>
+                <a:latin typeface="Segoe UI"/>
+              </a:defRPr>
+            </a:pPr>
+            <a:r>
+              <a:t>• 3 languages supported</a:t>
+            </a:r>
+          </a:p>
+        </p:txBody>
+      </p:sp>
+      <p:sp>
+        <p:nvSpPr>
+          <p:cNvPr id="12" name="Rounded Rectangle 11"/>
+          <p:cNvSpPr/>
+          <p:nvPr/>
+        </p:nvSpPr>
+        <p:spPr>
+          <a:xfrm>
+            <a:off x="8906256" y="1645920"/>
+            <a:ext cx="2560320" cy="4389120"/>
+          </a:xfrm>
+          <a:prstGeom prst="roundRect">
+            <a:avLst/>
+          </a:prstGeom>
+          <a:solidFill>
+            <a:srgbClr val="1E293B"/>
+          </a:solidFill>
+          <a:ln w="15240">
+            <a:solidFill>
+              <a:srgbClr val="334155"/>
+            </a:solidFill>
+          </a:ln>
+        </p:spPr>
+        <p:style>
+          <a:lnRef idx="1">
+            <a:schemeClr val="accent1"/>
+          </a:lnRef>
+          <a:fillRef idx="3">
+            <a:schemeClr val="accent1"/>
+          </a:fillRef>
+          <a:effectRef idx="2">
+            <a:schemeClr val="accent1"/>
+          </a:effectRef>
+          <a:fontRef idx="minor">
+            <a:schemeClr val="lt1"/>
+          </a:fontRef>
+        </p:style>
+        <p:txBody>
+          <a:bodyPr rtlCol="0" anchor="ctr"/>
+          <a:lstStyle/>
+          <a:p>
+            <a:pPr algn="ctr"/>
+          </a:p>
+        </p:txBody>
+      </p:sp>
+      <p:sp>
+        <p:nvSpPr>
+          <p:cNvPr id="13" name="TextBox 12"/>
+          <p:cNvSpPr txBox="1"/>
+          <p:nvPr/>
+        </p:nvSpPr>
+        <p:spPr>
+          <a:xfrm>
+            <a:off x="9043416" y="1828800"/>
+            <a:ext cx="2286000" cy="4023360"/>
+          </a:xfrm>
+          <a:prstGeom prst="rect">
+            <a:avLst/>
+          </a:prstGeom>
+          <a:noFill/>
+        </p:spPr>
+        <p:txBody>
+          <a:bodyPr wrap="square">
+            <a:spAutoFit/>
+          </a:bodyPr>
+          <a:lstStyle/>
+          <a:p>
+            <a:pPr>
+              <a:spcAft>
+                <a:spcPts val="400"/>
+              </a:spcAft>
+              <a:defRPr sz="1100" b="1">
+                <a:solidFill>
+                  <a:srgbClr val="EAB308"/>
+                </a:solidFill>
+                <a:latin typeface="Segoe UI"/>
+              </a:defRPr>
+            </a:pPr>
+            <a:r>
+              <a:t>LAB TECH PORTAL</a:t>
+            </a:r>
+          </a:p>
+          <a:p>
+            <a:pPr>
+              <a:spcAft>
+                <a:spcPts val="1200"/>
+              </a:spcAft>
+              <a:defRPr sz="1500" b="1">
+                <a:solidFill>
+                  <a:srgbClr val="F8FAFC"/>
+                </a:solidFill>
+                <a:latin typeface="Segoe UI"/>
+              </a:defRPr>
+            </a:pPr>
+            <a:r>
+              <a:t>Diagnostic &amp; PACS Ingestion</a:t>
+            </a:r>
+          </a:p>
+          <a:p>
+            <a:pPr>
+              <a:spcAft>
+                <a:spcPts val="1600"/>
+              </a:spcAft>
+              <a:defRPr sz="1100">
+                <a:solidFill>
+                  <a:srgbClr val="94A3B8"/>
+                </a:solidFill>
+                <a:latin typeface="Segoe UI"/>
+              </a:defRPr>
+            </a:pPr>
+            <a:r>
+              <a:t>Secure uploading of DICOM MRI scans, X-rays, pathology reports, and blood panels directly into the patient's EHR file.</a:t>
+            </a:r>
+          </a:p>
+          <a:p>
+            <a:pPr>
+              <a:spcAft>
+                <a:spcPts val="600"/>
+              </a:spcAft>
+              <a:defRPr sz="1000" b="1">
+                <a:solidFill>
+                  <a:srgbClr val="F8FAFC"/>
+                </a:solidFill>
+                <a:latin typeface="Segoe UI"/>
+              </a:defRPr>
+            </a:pPr>
+            <a:r>
+              <a:t>HEALTHCARE IMPACT:</a:t>
+            </a:r>
+          </a:p>
+          <a:p>
+            <a:pPr>
+              <a:spcAft>
+                <a:spcPts val="400"/>
+              </a:spcAft>
+              <a:defRPr sz="1000">
+                <a:solidFill>
+                  <a:srgbClr val="94A3B8"/>
+                </a:solidFill>
+                <a:latin typeface="Segoe UI"/>
+              </a:defRPr>
+            </a:pPr>
+            <a:r>
+              <a:t>• Direct DICOM feed</a:t>
+            </a:r>
+          </a:p>
+          <a:p>
+            <a:pPr>
+              <a:spcAft>
+                <a:spcPts val="400"/>
+              </a:spcAft>
+              <a:defRPr sz="1000">
+                <a:solidFill>
+                  <a:srgbClr val="94A3B8"/>
+                </a:solidFill>
+                <a:latin typeface="Segoe UI"/>
+              </a:defRPr>
+            </a:pPr>
+            <a:r>
+              <a:t>• Structured lab ingestion</a:t>
+            </a:r>
+          </a:p>
+          <a:p>
+            <a:pPr>
+              <a:spcAft>
+                <a:spcPts val="400"/>
+              </a:spcAft>
+              <a:defRPr sz="1000">
+                <a:solidFill>
+                  <a:srgbClr val="94A3B8"/>
+                </a:solidFill>
+                <a:latin typeface="Segoe UI"/>
+              </a:defRPr>
+            </a:pPr>
+            <a:r>
+              <a:t>• Immediate agent parsing</a:t>
             </a:r>
           </a:p>
         </p:txBody>
@@ -9975,7 +11828,7 @@
               </a:defRPr>
             </a:pPr>
             <a:r>
-              <a:t>LIVE DEMONSTRATION  •  TRACK 2: HEALTH &amp; WELLBEING | EVOLUS ON AMD</a:t>
+              <a:t>CLINICAL SAFETY &amp; ETHICS  •  TRACK 2: HEALTH &amp; WELLBEING | EVOLUS ON AMD</a:t>
             </a:r>
           </a:p>
         </p:txBody>
@@ -10011,7 +11864,7 @@
               </a:defRPr>
             </a:pPr>
             <a:r>
-              <a:t>Prototype Validation: The 3 Golden Clinical Scenarios</a:t>
+              <a:t>Making Uncertainty Visible: The Clinical Confidence Matrix</a:t>
             </a:r>
           </a:p>
         </p:txBody>
@@ -10068,7 +11921,7 @@
         <p:spPr>
           <a:xfrm>
             <a:off x="731520" y="1554480"/>
-            <a:ext cx="3474720" cy="4754880"/>
+            <a:ext cx="5266944" cy="4754880"/>
           </a:xfrm>
           <a:prstGeom prst="roundRect">
             <a:avLst/>
@@ -10112,8 +11965,8 @@
         </p:nvSpPr>
         <p:spPr>
           <a:xfrm>
-            <a:off x="914400" y="1737360"/>
-            <a:ext cx="3108960" cy="4389120"/>
+            <a:off x="1005840" y="1737360"/>
+            <a:ext cx="4718304" cy="4389120"/>
           </a:xfrm>
           <a:prstGeom prst="rect">
             <a:avLst/>
@@ -10128,9 +11981,41 @@
           <a:p>
             <a:pPr>
               <a:spcAft>
+                <a:spcPts val="600"/>
+              </a:spcAft>
+              <a:defRPr sz="1400" b="1">
+                <a:solidFill>
+                  <a:srgbClr val="EAB308"/>
+                </a:solidFill>
+                <a:latin typeface="Segoe UI"/>
+              </a:defRPr>
+            </a:pPr>
+            <a:r>
+              <a:t>EVIDENCE GAP &amp; CONFIDENCE TIERS</a:t>
+            </a:r>
+          </a:p>
+          <a:p>
+            <a:pPr>
+              <a:spcAft>
+                <a:spcPts val="1400"/>
+              </a:spcAft>
+              <a:defRPr sz="1800" b="1">
+                <a:solidFill>
+                  <a:srgbClr val="F8FAFC"/>
+                </a:solidFill>
+                <a:latin typeface="Segoe UI"/>
+              </a:defRPr>
+            </a:pPr>
+            <a:r>
+              <a:t>Eliminating Hallucinations in Patient Care</a:t>
+            </a:r>
+          </a:p>
+          <a:p>
+            <a:pPr>
+              <a:spcAft>
                 <a:spcPts val="200"/>
               </a:spcAft>
-              <a:defRPr sz="1100" b="1">
+              <a:defRPr sz="1200" b="1">
                 <a:solidFill>
                   <a:srgbClr val="22C55E"/>
                 </a:solidFill>
@@ -10138,29 +12023,13 @@
               </a:defRPr>
             </a:pPr>
             <a:r>
-              <a:t>CASE 1: KNEE ARTHROSCOPY</a:t>
-            </a:r>
-          </a:p>
-          <a:p>
-            <a:pPr>
-              <a:spcAft>
-                <a:spcPts val="400"/>
-              </a:spcAft>
-              <a:defRPr sz="1800" b="1">
-                <a:solidFill>
-                  <a:srgbClr val="F8FAFC"/>
-                </a:solidFill>
-                <a:latin typeface="Segoe UI"/>
-              </a:defRPr>
-            </a:pPr>
-            <a:r>
-              <a:t>Clean Auto-Approval</a:t>
-            </a:r>
-          </a:p>
-          <a:p>
-            <a:pPr>
-              <a:spcAft>
-                <a:spcPts val="1200"/>
+              <a:t>■  GREEN TIER (&gt;= 90% Confidence)</a:t>
+            </a:r>
+          </a:p>
+          <a:p>
+            <a:pPr>
+              <a:spcAft>
+                <a:spcPts val="800"/>
               </a:spcAft>
               <a:defRPr sz="1100">
                 <a:solidFill>
@@ -10170,30 +12039,30 @@
               </a:defRPr>
             </a:pPr>
             <a:r>
-              <a:t>CPT 29881 | Left Meniscectomy</a:t>
-            </a:r>
-          </a:p>
-          <a:p>
-            <a:pPr>
-              <a:spcBef>
-                <a:spcPts val="8500"/>
-              </a:spcBef>
-              <a:spcAft>
-                <a:spcPts val="400"/>
-              </a:spcAft>
-              <a:defRPr sz="1100" b="1">
-                <a:solidFill>
-                  <a:srgbClr val="F8FAFC"/>
-                </a:solidFill>
-                <a:latin typeface="Segoe UI"/>
-              </a:defRPr>
-            </a:pPr>
-            <a:r>
-              <a:t>OUTCOME &amp; IMPACT:</a:t>
-            </a:r>
-          </a:p>
-          <a:p>
-            <a:pPr>
+              <a:t>Clean Auto-Approval: All policy clauses matched with unambiguous EHR proof (e.g., MRI tears, 6+ months PT). Instant electronic packet generation.</a:t>
+            </a:r>
+          </a:p>
+          <a:p>
+            <a:pPr>
+              <a:spcAft>
+                <a:spcPts val="200"/>
+              </a:spcAft>
+              <a:defRPr sz="1200" b="1">
+                <a:solidFill>
+                  <a:srgbClr val="EAB308"/>
+                </a:solidFill>
+                <a:latin typeface="Segoe UI"/>
+              </a:defRPr>
+            </a:pPr>
+            <a:r>
+              <a:t>■  YELLOW TIER (70% - 89% Confidence)</a:t>
+            </a:r>
+          </a:p>
+          <a:p>
+            <a:pPr>
+              <a:spcAft>
+                <a:spcPts val="800"/>
+              </a:spcAft>
               <a:defRPr sz="1100">
                 <a:solidFill>
                   <a:srgbClr val="94A3B8"/>
@@ -10202,7 +12071,39 @@
               </a:defRPr>
             </a:pPr>
             <a:r>
-              <a:t>All 4 Anthem CG-SURG-01 criteria satisfied (6 mo PT, failed NSAIDs, MRI Grade III tear). Instant CMS-1500 packet generated.</a:t>
+              <a:t>Uncertainty Escalation: Partial evidence or missing step-therapy detected. System stops auto-approval, highlights exact missing proof, and routes to Nurse Review Queue.</a:t>
+            </a:r>
+          </a:p>
+          <a:p>
+            <a:pPr>
+              <a:spcAft>
+                <a:spcPts val="200"/>
+              </a:spcAft>
+              <a:defRPr sz="1200" b="1">
+                <a:solidFill>
+                  <a:srgbClr val="ED1C24"/>
+                </a:solidFill>
+                <a:latin typeface="Segoe UI"/>
+              </a:defRPr>
+            </a:pPr>
+            <a:r>
+              <a:t>■  RED TIER (&lt; 70% Confidence)</a:t>
+            </a:r>
+          </a:p>
+          <a:p>
+            <a:pPr>
+              <a:spcAft>
+                <a:spcPts val="800"/>
+              </a:spcAft>
+              <a:defRPr sz="1100">
+                <a:solidFill>
+                  <a:srgbClr val="94A3B8"/>
+                </a:solidFill>
+                <a:latin typeface="Segoe UI"/>
+              </a:defRPr>
+            </a:pPr>
+            <a:r>
+              <a:t>Definite Policy Discrepancy: Contradiction found or therapy contraindicated. Autonomous drafting of cited appeal letter or recommended alternative pathway.</a:t>
             </a:r>
           </a:p>
         </p:txBody>
@@ -10215,102 +12116,8 @@
         </p:nvSpPr>
         <p:spPr>
           <a:xfrm>
-            <a:off x="868680" y="2926080"/>
-            <a:ext cx="3200400" cy="822960"/>
-          </a:xfrm>
-          <a:prstGeom prst="roundRect">
-            <a:avLst/>
-          </a:prstGeom>
-          <a:solidFill>
-            <a:srgbClr val="0F172A"/>
-          </a:solidFill>
-          <a:ln w="12700">
-            <a:solidFill>
-              <a:srgbClr val="22C55E"/>
-            </a:solidFill>
-          </a:ln>
-        </p:spPr>
-        <p:style>
-          <a:lnRef idx="1">
-            <a:schemeClr val="accent1"/>
-          </a:lnRef>
-          <a:fillRef idx="3">
-            <a:schemeClr val="accent1"/>
-          </a:fillRef>
-          <a:effectRef idx="2">
-            <a:schemeClr val="accent1"/>
-          </a:effectRef>
-          <a:fontRef idx="minor">
-            <a:schemeClr val="lt1"/>
-          </a:fontRef>
-        </p:style>
-        <p:txBody>
-          <a:bodyPr rtlCol="0" anchor="ctr"/>
-          <a:lstStyle/>
-          <a:p>
-            <a:pPr algn="ctr"/>
-          </a:p>
-        </p:txBody>
-      </p:sp>
-      <p:sp>
-        <p:nvSpPr>
-          <p:cNvPr id="9" name="TextBox 8"/>
-          <p:cNvSpPr txBox="1"/>
-          <p:nvPr/>
-        </p:nvSpPr>
-        <p:spPr>
-          <a:xfrm>
-            <a:off x="960120" y="2971800"/>
-            <a:ext cx="3017520" cy="731520"/>
-          </a:xfrm>
-          <a:prstGeom prst="rect">
-            <a:avLst/>
-          </a:prstGeom>
-          <a:noFill/>
-        </p:spPr>
-        <p:txBody>
-          <a:bodyPr wrap="square">
-            <a:spAutoFit/>
-          </a:bodyPr>
-          <a:lstStyle/>
-          <a:p>
-            <a:pPr>
-              <a:defRPr sz="1100" b="1">
-                <a:solidFill>
-                  <a:srgbClr val="22C55E"/>
-                </a:solidFill>
-                <a:latin typeface="Segoe UI"/>
-              </a:defRPr>
-            </a:pPr>
-            <a:r>
-              <a:t>Confidence: 96% Confidence (Green)</a:t>
-            </a:r>
-          </a:p>
-          <a:p>
-            <a:pPr>
-              <a:defRPr sz="1000">
-                <a:solidFill>
-                  <a:srgbClr val="94A3B8"/>
-                </a:solidFill>
-                <a:latin typeface="Segoe UI"/>
-              </a:defRPr>
-            </a:pPr>
-            <a:r>
-              <a:t>Execution Time: 11.4 Seconds on AMD MI300X</a:t>
-            </a:r>
-          </a:p>
-        </p:txBody>
-      </p:sp>
-      <p:sp>
-        <p:nvSpPr>
-          <p:cNvPr id="10" name="Rounded Rectangle 9"/>
-          <p:cNvSpPr/>
-          <p:nvPr/>
-        </p:nvSpPr>
-        <p:spPr>
-          <a:xfrm>
-            <a:off x="4361688" y="1554480"/>
-            <a:ext cx="3474720" cy="4754880"/>
+            <a:off x="6190488" y="1554480"/>
+            <a:ext cx="5266944" cy="4754880"/>
           </a:xfrm>
           <a:prstGeom prst="roundRect">
             <a:avLst/>
@@ -10348,14 +12155,14 @@
       </p:sp>
       <p:sp>
         <p:nvSpPr>
-          <p:cNvPr id="11" name="TextBox 10"/>
+          <p:cNvPr id="9" name="TextBox 8"/>
           <p:cNvSpPr txBox="1"/>
           <p:nvPr/>
         </p:nvSpPr>
         <p:spPr>
           <a:xfrm>
-            <a:off x="4544568" y="1737360"/>
-            <a:ext cx="3108960" cy="4389120"/>
+            <a:off x="6464808" y="1737360"/>
+            <a:ext cx="4718304" cy="4389120"/>
           </a:xfrm>
           <a:prstGeom prst="rect">
             <a:avLst/>
@@ -10370,23 +12177,23 @@
           <a:p>
             <a:pPr>
               <a:spcAft>
-                <a:spcPts val="200"/>
-              </a:spcAft>
-              <a:defRPr sz="1100" b="1">
-                <a:solidFill>
-                  <a:srgbClr val="EAB308"/>
-                </a:solidFill>
-                <a:latin typeface="Segoe UI"/>
-              </a:defRPr>
-            </a:pPr>
-            <a:r>
-              <a:t>CASE 2: BIOLOGIC HUMIRA</a:t>
-            </a:r>
-          </a:p>
-          <a:p>
-            <a:pPr>
-              <a:spcAft>
-                <a:spcPts val="400"/>
+                <a:spcPts val="600"/>
+              </a:spcAft>
+              <a:defRPr sz="1400" b="1">
+                <a:solidFill>
+                  <a:srgbClr val="06B6D4"/>
+                </a:solidFill>
+                <a:latin typeface="Segoe UI"/>
+              </a:defRPr>
+            </a:pPr>
+            <a:r>
+              <a:t>HUMAN-IN-THE-LOOP CONTROL</a:t>
+            </a:r>
+          </a:p>
+          <a:p>
+            <a:pPr>
+              <a:spcAft>
+                <a:spcPts val="1400"/>
               </a:spcAft>
               <a:defRPr sz="1800" b="1">
                 <a:solidFill>
@@ -10396,391 +12203,79 @@
               </a:defRPr>
             </a:pPr>
             <a:r>
-              <a:t>Step-Therapy Gap Detected</a:t>
-            </a:r>
-          </a:p>
-          <a:p>
-            <a:pPr>
-              <a:spcAft>
-                <a:spcPts val="1200"/>
-              </a:spcAft>
-              <a:defRPr sz="1100">
+              <a:t>Doctors Always Hold the Final Sign-Off</a:t>
+            </a:r>
+          </a:p>
+          <a:p>
+            <a:pPr>
+              <a:spcAft>
+                <a:spcPts val="1000"/>
+              </a:spcAft>
+              <a:defRPr sz="1200" b="1">
+                <a:solidFill>
+                  <a:srgbClr val="14B8A6"/>
+                </a:solidFill>
+                <a:latin typeface="Segoe UI"/>
+              </a:defRPr>
+            </a:pPr>
+            <a:r>
+              <a:t>✔  Actionable Remediation Guidance: </a:t>
+            </a:r>
+            <a:r>
+              <a:rPr b="0">
                 <a:solidFill>
                   <a:srgbClr val="94A3B8"/>
                 </a:solidFill>
-                <a:latin typeface="Segoe UI"/>
-              </a:defRPr>
-            </a:pPr>
-            <a:r>
-              <a:t>HCPCS J0135 | Rheumatoid Arthritis</a:t>
-            </a:r>
-          </a:p>
-          <a:p>
-            <a:pPr>
-              <a:spcBef>
-                <a:spcPts val="8500"/>
-              </a:spcBef>
-              <a:spcAft>
-                <a:spcPts val="400"/>
-              </a:spcAft>
-              <a:defRPr sz="1100" b="1">
-                <a:solidFill>
-                  <a:srgbClr val="F8FAFC"/>
-                </a:solidFill>
-                <a:latin typeface="Segoe UI"/>
-              </a:defRPr>
-            </a:pPr>
-            <a:r>
-              <a:t>OUTCOME &amp; IMPACT:</a:t>
-            </a:r>
-          </a:p>
-          <a:p>
-            <a:pPr>
-              <a:defRPr sz="1100">
+              </a:rPr>
+              <a:t>Instead of a generic denial, the agent tells the clinic nurse: 'Upload proof of 3-month Methotrexate trial to achieve 95% approval.'</a:t>
+            </a:r>
+          </a:p>
+          <a:p>
+            <a:pPr>
+              <a:spcAft>
+                <a:spcPts val="1000"/>
+              </a:spcAft>
+              <a:defRPr sz="1200" b="1">
+                <a:solidFill>
+                  <a:srgbClr val="14B8A6"/>
+                </a:solidFill>
+                <a:latin typeface="Segoe UI"/>
+              </a:defRPr>
+            </a:pPr>
+            <a:r>
+              <a:t>✔  1-Click Physician Electronic Signature: </a:t>
+            </a:r>
+            <a:r>
+              <a:rPr b="0">
                 <a:solidFill>
                   <a:srgbClr val="94A3B8"/>
                 </a:solidFill>
-                <a:latin typeface="Segoe UI"/>
-              </a:defRPr>
-            </a:pPr>
-            <a:r>
-              <a:t>Medicare LCD L33777 requires 3-month trial of conventional DMARD. Chart showed only Prednisone. Escalated to Nurse Queue.</a:t>
-            </a:r>
-          </a:p>
-        </p:txBody>
-      </p:sp>
-      <p:sp>
-        <p:nvSpPr>
-          <p:cNvPr id="12" name="Rounded Rectangle 11"/>
-          <p:cNvSpPr/>
-          <p:nvPr/>
-        </p:nvSpPr>
-        <p:spPr>
-          <a:xfrm>
-            <a:off x="4498848" y="2926080"/>
-            <a:ext cx="3200400" cy="822960"/>
-          </a:xfrm>
-          <a:prstGeom prst="roundRect">
-            <a:avLst/>
-          </a:prstGeom>
-          <a:solidFill>
-            <a:srgbClr val="0F172A"/>
-          </a:solidFill>
-          <a:ln w="12700">
-            <a:solidFill>
-              <a:srgbClr val="EAB308"/>
-            </a:solidFill>
-          </a:ln>
-        </p:spPr>
-        <p:style>
-          <a:lnRef idx="1">
-            <a:schemeClr val="accent1"/>
-          </a:lnRef>
-          <a:fillRef idx="3">
-            <a:schemeClr val="accent1"/>
-          </a:fillRef>
-          <a:effectRef idx="2">
-            <a:schemeClr val="accent1"/>
-          </a:effectRef>
-          <a:fontRef idx="minor">
-            <a:schemeClr val="lt1"/>
-          </a:fontRef>
-        </p:style>
-        <p:txBody>
-          <a:bodyPr rtlCol="0" anchor="ctr"/>
-          <a:lstStyle/>
-          <a:p>
-            <a:pPr algn="ctr"/>
-          </a:p>
-        </p:txBody>
-      </p:sp>
-      <p:sp>
-        <p:nvSpPr>
-          <p:cNvPr id="13" name="TextBox 12"/>
-          <p:cNvSpPr txBox="1"/>
-          <p:nvPr/>
-        </p:nvSpPr>
-        <p:spPr>
-          <a:xfrm>
-            <a:off x="4590288" y="2971800"/>
-            <a:ext cx="3017520" cy="731520"/>
-          </a:xfrm>
-          <a:prstGeom prst="rect">
-            <a:avLst/>
-          </a:prstGeom>
-          <a:noFill/>
-        </p:spPr>
-        <p:txBody>
-          <a:bodyPr wrap="square">
-            <a:spAutoFit/>
-          </a:bodyPr>
-          <a:lstStyle/>
-          <a:p>
-            <a:pPr>
-              <a:defRPr sz="1100" b="1">
-                <a:solidFill>
-                  <a:srgbClr val="EAB308"/>
-                </a:solidFill>
-                <a:latin typeface="Segoe UI"/>
-              </a:defRPr>
-            </a:pPr>
-            <a:r>
-              <a:t>Confidence: 64% Confidence (Yellow Alert)</a:t>
-            </a:r>
-          </a:p>
-          <a:p>
-            <a:pPr>
-              <a:defRPr sz="1000">
+              </a:rPr>
+              <a:t>The attending doctor reviews the highlighted clinical evidence and signs electronically with one click.</a:t>
+            </a:r>
+          </a:p>
+          <a:p>
+            <a:pPr>
+              <a:spcAft>
+                <a:spcPts val="1000"/>
+              </a:spcAft>
+              <a:defRPr sz="1200" b="1">
+                <a:solidFill>
+                  <a:srgbClr val="14B8A6"/>
+                </a:solidFill>
+                <a:latin typeface="Segoe UI"/>
+              </a:defRPr>
+            </a:pPr>
+            <a:r>
+              <a:t>✔  Immutable Audit Trail: </a:t>
+            </a:r>
+            <a:r>
+              <a:rPr b="0">
                 <a:solidFill>
                   <a:srgbClr val="94A3B8"/>
                 </a:solidFill>
-                <a:latin typeface="Segoe UI"/>
-              </a:defRPr>
-            </a:pPr>
-            <a:r>
-              <a:t>Execution Time: 14.2 Seconds on AMD MI300X</a:t>
-            </a:r>
-          </a:p>
-        </p:txBody>
-      </p:sp>
-      <p:sp>
-        <p:nvSpPr>
-          <p:cNvPr id="14" name="Rounded Rectangle 13"/>
-          <p:cNvSpPr/>
-          <p:nvPr/>
-        </p:nvSpPr>
-        <p:spPr>
-          <a:xfrm>
-            <a:off x="7991856" y="1554480"/>
-            <a:ext cx="3474720" cy="4754880"/>
-          </a:xfrm>
-          <a:prstGeom prst="roundRect">
-            <a:avLst/>
-          </a:prstGeom>
-          <a:solidFill>
-            <a:srgbClr val="1E293B"/>
-          </a:solidFill>
-          <a:ln w="15240">
-            <a:solidFill>
-              <a:srgbClr val="334155"/>
-            </a:solidFill>
-          </a:ln>
-        </p:spPr>
-        <p:style>
-          <a:lnRef idx="1">
-            <a:schemeClr val="accent1"/>
-          </a:lnRef>
-          <a:fillRef idx="3">
-            <a:schemeClr val="accent1"/>
-          </a:fillRef>
-          <a:effectRef idx="2">
-            <a:schemeClr val="accent1"/>
-          </a:effectRef>
-          <a:fontRef idx="minor">
-            <a:schemeClr val="lt1"/>
-          </a:fontRef>
-        </p:style>
-        <p:txBody>
-          <a:bodyPr rtlCol="0" anchor="ctr"/>
-          <a:lstStyle/>
-          <a:p>
-            <a:pPr algn="ctr"/>
-          </a:p>
-        </p:txBody>
-      </p:sp>
-      <p:sp>
-        <p:nvSpPr>
-          <p:cNvPr id="15" name="TextBox 14"/>
-          <p:cNvSpPr txBox="1"/>
-          <p:nvPr/>
-        </p:nvSpPr>
-        <p:spPr>
-          <a:xfrm>
-            <a:off x="8174736" y="1737360"/>
-            <a:ext cx="3108960" cy="4389120"/>
-          </a:xfrm>
-          <a:prstGeom prst="rect">
-            <a:avLst/>
-          </a:prstGeom>
-          <a:noFill/>
-        </p:spPr>
-        <p:txBody>
-          <a:bodyPr wrap="square">
-            <a:spAutoFit/>
-          </a:bodyPr>
-          <a:lstStyle/>
-          <a:p>
-            <a:pPr>
-              <a:spcAft>
-                <a:spcPts val="200"/>
-              </a:spcAft>
-              <a:defRPr sz="1100" b="1">
-                <a:solidFill>
-                  <a:srgbClr val="06B6D4"/>
-                </a:solidFill>
-                <a:latin typeface="Segoe UI"/>
-              </a:defRPr>
-            </a:pPr>
-            <a:r>
-              <a:t>CASE 3: TERTIARY APPEAL</a:t>
-            </a:r>
-          </a:p>
-          <a:p>
-            <a:pPr>
-              <a:spcAft>
-                <a:spcPts val="400"/>
-              </a:spcAft>
-              <a:defRPr sz="1800" b="1">
-                <a:solidFill>
-                  <a:srgbClr val="F8FAFC"/>
-                </a:solidFill>
-                <a:latin typeface="Segoe UI"/>
-              </a:defRPr>
-            </a:pPr>
-            <a:r>
-              <a:t>Prior Denial Overturn</a:t>
-            </a:r>
-          </a:p>
-          <a:p>
-            <a:pPr>
-              <a:spcAft>
-                <a:spcPts val="1200"/>
-              </a:spcAft>
-              <a:defRPr sz="1100">
-                <a:solidFill>
-                  <a:srgbClr val="94A3B8"/>
-                </a:solidFill>
-                <a:latin typeface="Segoe UI"/>
-              </a:defRPr>
-            </a:pPr>
-            <a:r>
-              <a:t>Complex Inpatient Transfer</a:t>
-            </a:r>
-          </a:p>
-          <a:p>
-            <a:pPr>
-              <a:spcBef>
-                <a:spcPts val="8500"/>
-              </a:spcBef>
-              <a:spcAft>
-                <a:spcPts val="400"/>
-              </a:spcAft>
-              <a:defRPr sz="1100" b="1">
-                <a:solidFill>
-                  <a:srgbClr val="F8FAFC"/>
-                </a:solidFill>
-                <a:latin typeface="Segoe UI"/>
-              </a:defRPr>
-            </a:pPr>
-            <a:r>
-              <a:t>OUTCOME &amp; IMPACT:</a:t>
-            </a:r>
-          </a:p>
-          <a:p>
-            <a:pPr>
-              <a:defRPr sz="1100">
-                <a:solidFill>
-                  <a:srgbClr val="94A3B8"/>
-                </a:solidFill>
-                <a:latin typeface="Segoe UI"/>
-              </a:defRPr>
-            </a:pPr>
-            <a:r>
-              <a:t>Prior claim denied for lack of conservative therapy. Agent located statutory hepatic transaminitis exemption in 45-page chart.</a:t>
-            </a:r>
-          </a:p>
-        </p:txBody>
-      </p:sp>
-      <p:sp>
-        <p:nvSpPr>
-          <p:cNvPr id="16" name="Rounded Rectangle 15"/>
-          <p:cNvSpPr/>
-          <p:nvPr/>
-        </p:nvSpPr>
-        <p:spPr>
-          <a:xfrm>
-            <a:off x="8129016" y="2926080"/>
-            <a:ext cx="3200400" cy="822960"/>
-          </a:xfrm>
-          <a:prstGeom prst="roundRect">
-            <a:avLst/>
-          </a:prstGeom>
-          <a:solidFill>
-            <a:srgbClr val="0F172A"/>
-          </a:solidFill>
-          <a:ln w="12700">
-            <a:solidFill>
-              <a:srgbClr val="06B6D4"/>
-            </a:solidFill>
-          </a:ln>
-        </p:spPr>
-        <p:style>
-          <a:lnRef idx="1">
-            <a:schemeClr val="accent1"/>
-          </a:lnRef>
-          <a:fillRef idx="3">
-            <a:schemeClr val="accent1"/>
-          </a:fillRef>
-          <a:effectRef idx="2">
-            <a:schemeClr val="accent1"/>
-          </a:effectRef>
-          <a:fontRef idx="minor">
-            <a:schemeClr val="lt1"/>
-          </a:fontRef>
-        </p:style>
-        <p:txBody>
-          <a:bodyPr rtlCol="0" anchor="ctr"/>
-          <a:lstStyle/>
-          <a:p>
-            <a:pPr algn="ctr"/>
-          </a:p>
-        </p:txBody>
-      </p:sp>
-      <p:sp>
-        <p:nvSpPr>
-          <p:cNvPr id="17" name="TextBox 16"/>
-          <p:cNvSpPr txBox="1"/>
-          <p:nvPr/>
-        </p:nvSpPr>
-        <p:spPr>
-          <a:xfrm>
-            <a:off x="8220456" y="2971800"/>
-            <a:ext cx="3017520" cy="731520"/>
-          </a:xfrm>
-          <a:prstGeom prst="rect">
-            <a:avLst/>
-          </a:prstGeom>
-          <a:noFill/>
-        </p:spPr>
-        <p:txBody>
-          <a:bodyPr wrap="square">
-            <a:spAutoFit/>
-          </a:bodyPr>
-          <a:lstStyle/>
-          <a:p>
-            <a:pPr>
-              <a:defRPr sz="1100" b="1">
-                <a:solidFill>
-                  <a:srgbClr val="06B6D4"/>
-                </a:solidFill>
-                <a:latin typeface="Segoe UI"/>
-              </a:defRPr>
-            </a:pPr>
-            <a:r>
-              <a:t>Confidence: 92% Overturn Score</a:t>
-            </a:r>
-          </a:p>
-          <a:p>
-            <a:pPr>
-              <a:defRPr sz="1000">
-                <a:solidFill>
-                  <a:srgbClr val="94A3B8"/>
-                </a:solidFill>
-                <a:latin typeface="Segoe UI"/>
-              </a:defRPr>
-            </a:pPr>
-            <a:r>
-              <a:t>Execution Time: 18.1 Seconds on AMD MI300X</a:t>
+              </a:rPr>
+              <a:t>Every agent decision, prompt trace, token speed, and human edit is permanently logged for HIPAA compliance and payer scrutiny.</a:t>
             </a:r>
           </a:p>
         </p:txBody>
@@ -10877,7 +12372,7 @@
               </a:defRPr>
             </a:pPr>
             <a:r>
-              <a:t>HEALTH EQUITY &amp; ACCESSIBILITY  •  TRACK 2: HEALTH &amp; WELLBEING | EVOLUS ON AMD</a:t>
+              <a:t>LIVE DEMONSTRATION  •  TRACK 2: HEALTH &amp; WELLBEING | EVOLUS ON AMD</a:t>
             </a:r>
           </a:p>
         </p:txBody>
@@ -10913,7 +12408,7 @@
               </a:defRPr>
             </a:pPr>
             <a:r>
-              <a:t>Patient Empowerment &amp; Multilingual Health Equity</a:t>
+              <a:t>Prototype Validation: The 3 Golden Clinical Scenarios</a:t>
             </a:r>
           </a:p>
         </p:txBody>
@@ -10970,7 +12465,7 @@
         <p:spPr>
           <a:xfrm>
             <a:off x="731520" y="1554480"/>
-            <a:ext cx="5266944" cy="4754880"/>
+            <a:ext cx="3474720" cy="4754880"/>
           </a:xfrm>
           <a:prstGeom prst="roundRect">
             <a:avLst/>
@@ -11014,8 +12509,8 @@
         </p:nvSpPr>
         <p:spPr>
           <a:xfrm>
-            <a:off x="1005840" y="1737360"/>
-            <a:ext cx="4718304" cy="4389120"/>
+            <a:off x="914400" y="1737360"/>
+            <a:ext cx="3108960" cy="4389120"/>
           </a:xfrm>
           <a:prstGeom prst="rect">
             <a:avLst/>
@@ -11030,23 +12525,23 @@
           <a:p>
             <a:pPr>
               <a:spcAft>
-                <a:spcPts val="600"/>
-              </a:spcAft>
-              <a:defRPr sz="1400" b="1">
-                <a:solidFill>
-                  <a:srgbClr val="ED1C24"/>
-                </a:solidFill>
-                <a:latin typeface="Segoe UI"/>
-              </a:defRPr>
-            </a:pPr>
-            <a:r>
-              <a:t>TRADITIONAL PAYER LETTERS</a:t>
-            </a:r>
-          </a:p>
-          <a:p>
-            <a:pPr>
-              <a:spcAft>
-                <a:spcPts val="1400"/>
+                <a:spcPts val="200"/>
+              </a:spcAft>
+              <a:defRPr sz="1100" b="1">
+                <a:solidFill>
+                  <a:srgbClr val="22C55E"/>
+                </a:solidFill>
+                <a:latin typeface="Segoe UI"/>
+              </a:defRPr>
+            </a:pPr>
+            <a:r>
+              <a:t>CASE 1: KNEE ARTHROSCOPY</a:t>
+            </a:r>
+          </a:p>
+          <a:p>
+            <a:pPr>
+              <a:spcAft>
+                <a:spcPts val="400"/>
               </a:spcAft>
               <a:defRPr sz="1800" b="1">
                 <a:solidFill>
@@ -11056,31 +12551,47 @@
               </a:defRPr>
             </a:pPr>
             <a:r>
-              <a:t>Confusing Jargon &amp; Patient Anxiety</a:t>
-            </a:r>
-          </a:p>
-          <a:p>
-            <a:pPr>
-              <a:spcAft>
-                <a:spcPts val="600"/>
-              </a:spcAft>
-              <a:defRPr sz="1200" b="1">
-                <a:solidFill>
-                  <a:srgbClr val="EAB308"/>
-                </a:solidFill>
-                <a:latin typeface="Segoe UI"/>
-              </a:defRPr>
-            </a:pPr>
-            <a:r>
-              <a:t>Typical Insurance Denial Letter (Real Example):</a:t>
+              <a:t>Clean Auto-Approval</a:t>
+            </a:r>
+          </a:p>
+          <a:p>
+            <a:pPr>
+              <a:spcAft>
+                <a:spcPts val="1200"/>
+              </a:spcAft>
+              <a:defRPr sz="1100">
+                <a:solidFill>
+                  <a:srgbClr val="94A3B8"/>
+                </a:solidFill>
+                <a:latin typeface="Segoe UI"/>
+              </a:defRPr>
+            </a:pPr>
+            <a:r>
+              <a:t>CPT 29881 | Left Meniscectomy</a:t>
             </a:r>
           </a:p>
           <a:p>
             <a:pPr>
               <a:spcBef>
-                <a:spcPts val="11000"/>
+                <a:spcPts val="8500"/>
               </a:spcBef>
-              <a:defRPr sz="1200">
+              <a:spcAft>
+                <a:spcPts val="400"/>
+              </a:spcAft>
+              <a:defRPr sz="1100" b="1">
+                <a:solidFill>
+                  <a:srgbClr val="F8FAFC"/>
+                </a:solidFill>
+                <a:latin typeface="Segoe UI"/>
+              </a:defRPr>
+            </a:pPr>
+            <a:r>
+              <a:t>OUTCOME &amp; IMPACT:</a:t>
+            </a:r>
+          </a:p>
+          <a:p>
+            <a:pPr>
+              <a:defRPr sz="1100">
                 <a:solidFill>
                   <a:srgbClr val="94A3B8"/>
                 </a:solidFill>
@@ -11088,7 +12599,7 @@
               </a:defRPr>
             </a:pPr>
             <a:r>
-              <a:t>The Result: 90% of patients do not understand why their care was denied, leading to panic, missed appointments, and worsened clinical outcomes.</a:t>
+              <a:t>All 4 Anthem CG-SURG-01 criteria satisfied (6 mo PT, failed NSAIDs, MRI Grade III tear). Instant CMS-1500 packet generated.</a:t>
             </a:r>
           </a:p>
         </p:txBody>
@@ -11101,8 +12612,8 @@
         </p:nvSpPr>
         <p:spPr>
           <a:xfrm>
-            <a:off x="1005840" y="2926080"/>
-            <a:ext cx="4718304" cy="1645920"/>
+            <a:off x="868680" y="2926080"/>
+            <a:ext cx="3200400" cy="822960"/>
           </a:xfrm>
           <a:prstGeom prst="roundRect">
             <a:avLst/>
@@ -11110,9 +12621,9 @@
           <a:solidFill>
             <a:srgbClr val="0F172A"/>
           </a:solidFill>
-          <a:ln>
+          <a:ln w="12700">
             <a:solidFill>
-              <a:srgbClr val="334155"/>
+              <a:srgbClr val="22C55E"/>
             </a:solidFill>
           </a:ln>
         </p:spPr>
@@ -11131,11 +12642,50 @@
           </a:fontRef>
         </p:style>
         <p:txBody>
-          <a:bodyPr rtlCol="0" anchor="ctr" wrap="square"/>
-          <a:lstStyle/>
-          <a:p>
-            <a:pPr algn="ctr">
-              <a:defRPr sz="1100" i="1">
+          <a:bodyPr rtlCol="0" anchor="ctr"/>
+          <a:lstStyle/>
+          <a:p>
+            <a:pPr algn="ctr"/>
+          </a:p>
+        </p:txBody>
+      </p:sp>
+      <p:sp>
+        <p:nvSpPr>
+          <p:cNvPr id="9" name="TextBox 8"/>
+          <p:cNvSpPr txBox="1"/>
+          <p:nvPr/>
+        </p:nvSpPr>
+        <p:spPr>
+          <a:xfrm>
+            <a:off x="960120" y="2971800"/>
+            <a:ext cx="3017520" cy="731520"/>
+          </a:xfrm>
+          <a:prstGeom prst="rect">
+            <a:avLst/>
+          </a:prstGeom>
+          <a:noFill/>
+        </p:spPr>
+        <p:txBody>
+          <a:bodyPr wrap="square">
+            <a:spAutoFit/>
+          </a:bodyPr>
+          <a:lstStyle/>
+          <a:p>
+            <a:pPr>
+              <a:defRPr sz="1100" b="1">
+                <a:solidFill>
+                  <a:srgbClr val="22C55E"/>
+                </a:solidFill>
+                <a:latin typeface="Segoe UI"/>
+              </a:defRPr>
+            </a:pPr>
+            <a:r>
+              <a:t>Confidence: 96% Confidence (Green)</a:t>
+            </a:r>
+          </a:p>
+          <a:p>
+            <a:pPr>
+              <a:defRPr sz="1000">
                 <a:solidFill>
                   <a:srgbClr val="94A3B8"/>
                 </a:solidFill>
@@ -11143,21 +12693,21 @@
               </a:defRPr>
             </a:pPr>
             <a:r>
-              <a:t>"Coverage for CPT 29881 is denied pursuant to CG-SURG-01 §3.b.ii due to failure to demonstrate exhaustion of conservative physical medicine modalities and non-congruent radiologic MRI documentation of chondromalacia patellae."</a:t>
-            </a:r>
-          </a:p>
-        </p:txBody>
-      </p:sp>
-      <p:sp>
-        <p:nvSpPr>
-          <p:cNvPr id="9" name="Rounded Rectangle 8"/>
+              <a:t>Execution Time: 11.4 Seconds on AMD MI300X</a:t>
+            </a:r>
+          </a:p>
+        </p:txBody>
+      </p:sp>
+      <p:sp>
+        <p:nvSpPr>
+          <p:cNvPr id="10" name="Rounded Rectangle 9"/>
           <p:cNvSpPr/>
           <p:nvPr/>
         </p:nvSpPr>
         <p:spPr>
           <a:xfrm>
-            <a:off x="6190488" y="1554480"/>
-            <a:ext cx="5266944" cy="4754880"/>
+            <a:off x="4361688" y="1554480"/>
+            <a:ext cx="3474720" cy="4754880"/>
           </a:xfrm>
           <a:prstGeom prst="roundRect">
             <a:avLst/>
@@ -11195,14 +12745,14 @@
       </p:sp>
       <p:sp>
         <p:nvSpPr>
-          <p:cNvPr id="10" name="TextBox 9"/>
+          <p:cNvPr id="11" name="TextBox 10"/>
           <p:cNvSpPr txBox="1"/>
           <p:nvPr/>
         </p:nvSpPr>
         <p:spPr>
           <a:xfrm>
-            <a:off x="6464808" y="1737360"/>
-            <a:ext cx="4718304" cy="4389120"/>
+            <a:off x="4544568" y="1737360"/>
+            <a:ext cx="3108960" cy="4389120"/>
           </a:xfrm>
           <a:prstGeom prst="rect">
             <a:avLst/>
@@ -11217,23 +12767,23 @@
           <a:p>
             <a:pPr>
               <a:spcAft>
-                <a:spcPts val="600"/>
-              </a:spcAft>
-              <a:defRPr sz="1400" b="1">
-                <a:solidFill>
-                  <a:srgbClr val="14B8A6"/>
-                </a:solidFill>
-                <a:latin typeface="Segoe UI"/>
-              </a:defRPr>
-            </a:pPr>
-            <a:r>
-              <a:t>CAREAUTH-ROCM PATIENT TAB</a:t>
-            </a:r>
-          </a:p>
-          <a:p>
-            <a:pPr>
-              <a:spcAft>
-                <a:spcPts val="1400"/>
+                <a:spcPts val="200"/>
+              </a:spcAft>
+              <a:defRPr sz="1100" b="1">
+                <a:solidFill>
+                  <a:srgbClr val="EAB308"/>
+                </a:solidFill>
+                <a:latin typeface="Segoe UI"/>
+              </a:defRPr>
+            </a:pPr>
+            <a:r>
+              <a:t>CASE 2: BIOLOGIC HUMIRA</a:t>
+            </a:r>
+          </a:p>
+          <a:p>
+            <a:pPr>
+              <a:spcAft>
+                <a:spcPts val="400"/>
               </a:spcAft>
               <a:defRPr sz="1800" b="1">
                 <a:solidFill>
@@ -11243,15 +12793,225 @@
               </a:defRPr>
             </a:pPr>
             <a:r>
-              <a:t>6th-Grade Reading Level in 3 Languages</a:t>
-            </a:r>
-          </a:p>
+              <a:t>Step-Therapy Gap Detected</a:t>
+            </a:r>
+          </a:p>
+          <a:p>
+            <a:pPr>
+              <a:spcAft>
+                <a:spcPts val="1200"/>
+              </a:spcAft>
+              <a:defRPr sz="1100">
+                <a:solidFill>
+                  <a:srgbClr val="94A3B8"/>
+                </a:solidFill>
+                <a:latin typeface="Segoe UI"/>
+              </a:defRPr>
+            </a:pPr>
+            <a:r>
+              <a:t>HCPCS J0135 | Rheumatoid Arthritis</a:t>
+            </a:r>
+          </a:p>
+          <a:p>
+            <a:pPr>
+              <a:spcBef>
+                <a:spcPts val="8500"/>
+              </a:spcBef>
+              <a:spcAft>
+                <a:spcPts val="400"/>
+              </a:spcAft>
+              <a:defRPr sz="1100" b="1">
+                <a:solidFill>
+                  <a:srgbClr val="F8FAFC"/>
+                </a:solidFill>
+                <a:latin typeface="Segoe UI"/>
+              </a:defRPr>
+            </a:pPr>
+            <a:r>
+              <a:t>OUTCOME &amp; IMPACT:</a:t>
+            </a:r>
+          </a:p>
+          <a:p>
+            <a:pPr>
+              <a:defRPr sz="1100">
+                <a:solidFill>
+                  <a:srgbClr val="94A3B8"/>
+                </a:solidFill>
+                <a:latin typeface="Segoe UI"/>
+              </a:defRPr>
+            </a:pPr>
+            <a:r>
+              <a:t>Medicare LCD L33777 requires 3-month trial of conventional DMARD. Chart showed only Prednisone. Escalated to Nurse Queue.</a:t>
+            </a:r>
+          </a:p>
+        </p:txBody>
+      </p:sp>
+      <p:sp>
+        <p:nvSpPr>
+          <p:cNvPr id="12" name="Rounded Rectangle 11"/>
+          <p:cNvSpPr/>
+          <p:nvPr/>
+        </p:nvSpPr>
+        <p:spPr>
+          <a:xfrm>
+            <a:off x="4498848" y="2926080"/>
+            <a:ext cx="3200400" cy="822960"/>
+          </a:xfrm>
+          <a:prstGeom prst="roundRect">
+            <a:avLst/>
+          </a:prstGeom>
+          <a:solidFill>
+            <a:srgbClr val="0F172A"/>
+          </a:solidFill>
+          <a:ln w="12700">
+            <a:solidFill>
+              <a:srgbClr val="EAB308"/>
+            </a:solidFill>
+          </a:ln>
+        </p:spPr>
+        <p:style>
+          <a:lnRef idx="1">
+            <a:schemeClr val="accent1"/>
+          </a:lnRef>
+          <a:fillRef idx="3">
+            <a:schemeClr val="accent1"/>
+          </a:fillRef>
+          <a:effectRef idx="2">
+            <a:schemeClr val="accent1"/>
+          </a:effectRef>
+          <a:fontRef idx="minor">
+            <a:schemeClr val="lt1"/>
+          </a:fontRef>
+        </p:style>
+        <p:txBody>
+          <a:bodyPr rtlCol="0" anchor="ctr"/>
+          <a:lstStyle/>
+          <a:p>
+            <a:pPr algn="ctr"/>
+          </a:p>
+        </p:txBody>
+      </p:sp>
+      <p:sp>
+        <p:nvSpPr>
+          <p:cNvPr id="13" name="TextBox 12"/>
+          <p:cNvSpPr txBox="1"/>
+          <p:nvPr/>
+        </p:nvSpPr>
+        <p:spPr>
+          <a:xfrm>
+            <a:off x="4590288" y="2971800"/>
+            <a:ext cx="3017520" cy="731520"/>
+          </a:xfrm>
+          <a:prstGeom prst="rect">
+            <a:avLst/>
+          </a:prstGeom>
+          <a:noFill/>
+        </p:spPr>
+        <p:txBody>
+          <a:bodyPr wrap="square">
+            <a:spAutoFit/>
+          </a:bodyPr>
+          <a:lstStyle/>
+          <a:p>
+            <a:pPr>
+              <a:defRPr sz="1100" b="1">
+                <a:solidFill>
+                  <a:srgbClr val="EAB308"/>
+                </a:solidFill>
+                <a:latin typeface="Segoe UI"/>
+              </a:defRPr>
+            </a:pPr>
+            <a:r>
+              <a:t>Confidence: 64% Confidence (Yellow Alert)</a:t>
+            </a:r>
+          </a:p>
+          <a:p>
+            <a:pPr>
+              <a:defRPr sz="1000">
+                <a:solidFill>
+                  <a:srgbClr val="94A3B8"/>
+                </a:solidFill>
+                <a:latin typeface="Segoe UI"/>
+              </a:defRPr>
+            </a:pPr>
+            <a:r>
+              <a:t>Execution Time: 14.2 Seconds on AMD MI300X</a:t>
+            </a:r>
+          </a:p>
+        </p:txBody>
+      </p:sp>
+      <p:sp>
+        <p:nvSpPr>
+          <p:cNvPr id="14" name="Rounded Rectangle 13"/>
+          <p:cNvSpPr/>
+          <p:nvPr/>
+        </p:nvSpPr>
+        <p:spPr>
+          <a:xfrm>
+            <a:off x="7991856" y="1554480"/>
+            <a:ext cx="3474720" cy="4754880"/>
+          </a:xfrm>
+          <a:prstGeom prst="roundRect">
+            <a:avLst/>
+          </a:prstGeom>
+          <a:solidFill>
+            <a:srgbClr val="1E293B"/>
+          </a:solidFill>
+          <a:ln w="15240">
+            <a:solidFill>
+              <a:srgbClr val="334155"/>
+            </a:solidFill>
+          </a:ln>
+        </p:spPr>
+        <p:style>
+          <a:lnRef idx="1">
+            <a:schemeClr val="accent1"/>
+          </a:lnRef>
+          <a:fillRef idx="3">
+            <a:schemeClr val="accent1"/>
+          </a:fillRef>
+          <a:effectRef idx="2">
+            <a:schemeClr val="accent1"/>
+          </a:effectRef>
+          <a:fontRef idx="minor">
+            <a:schemeClr val="lt1"/>
+          </a:fontRef>
+        </p:style>
+        <p:txBody>
+          <a:bodyPr rtlCol="0" anchor="ctr"/>
+          <a:lstStyle/>
+          <a:p>
+            <a:pPr algn="ctr"/>
+          </a:p>
+        </p:txBody>
+      </p:sp>
+      <p:sp>
+        <p:nvSpPr>
+          <p:cNvPr id="15" name="TextBox 14"/>
+          <p:cNvSpPr txBox="1"/>
+          <p:nvPr/>
+        </p:nvSpPr>
+        <p:spPr>
+          <a:xfrm>
+            <a:off x="8174736" y="1737360"/>
+            <a:ext cx="3108960" cy="4389120"/>
+          </a:xfrm>
+          <a:prstGeom prst="rect">
+            <a:avLst/>
+          </a:prstGeom>
+          <a:noFill/>
+        </p:spPr>
+        <p:txBody>
+          <a:bodyPr wrap="square">
+            <a:spAutoFit/>
+          </a:bodyPr>
+          <a:lstStyle/>
           <a:p>
             <a:pPr>
               <a:spcAft>
                 <a:spcPts val="200"/>
               </a:spcAft>
-              <a:defRPr sz="1200" b="1">
+              <a:defRPr sz="1100" b="1">
                 <a:solidFill>
                   <a:srgbClr val="06B6D4"/>
                 </a:solidFill>
@@ -11259,13 +13019,29 @@
               </a:defRPr>
             </a:pPr>
             <a:r>
-              <a:t>English Summary: </a:t>
-            </a:r>
-          </a:p>
-          <a:p>
-            <a:pPr>
-              <a:spcAft>
-                <a:spcPts val="800"/>
+              <a:t>CASE 3: TERTIARY APPEAL</a:t>
+            </a:r>
+          </a:p>
+          <a:p>
+            <a:pPr>
+              <a:spcAft>
+                <a:spcPts val="400"/>
+              </a:spcAft>
+              <a:defRPr sz="1800" b="1">
+                <a:solidFill>
+                  <a:srgbClr val="F8FAFC"/>
+                </a:solidFill>
+                <a:latin typeface="Segoe UI"/>
+              </a:defRPr>
+            </a:pPr>
+            <a:r>
+              <a:t>Prior Denial Overturn</a:t>
+            </a:r>
+          </a:p>
+          <a:p>
+            <a:pPr>
+              <a:spcAft>
+                <a:spcPts val="1200"/>
               </a:spcAft>
               <a:defRPr sz="1100">
                 <a:solidFill>
@@ -11275,15 +13051,112 @@
               </a:defRPr>
             </a:pPr>
             <a:r>
-              <a:t>"Good news! Your knee surgery has been approved. Your doctor showed you did 6 months of physical therapy and your MRI confirmed a torn meniscus."</a:t>
-            </a:r>
-          </a:p>
-          <a:p>
-            <a:pPr>
-              <a:spcAft>
-                <a:spcPts val="200"/>
-              </a:spcAft>
-              <a:defRPr sz="1200" b="1">
+              <a:t>Complex Inpatient Transfer</a:t>
+            </a:r>
+          </a:p>
+          <a:p>
+            <a:pPr>
+              <a:spcBef>
+                <a:spcPts val="8500"/>
+              </a:spcBef>
+              <a:spcAft>
+                <a:spcPts val="400"/>
+              </a:spcAft>
+              <a:defRPr sz="1100" b="1">
+                <a:solidFill>
+                  <a:srgbClr val="F8FAFC"/>
+                </a:solidFill>
+                <a:latin typeface="Segoe UI"/>
+              </a:defRPr>
+            </a:pPr>
+            <a:r>
+              <a:t>OUTCOME &amp; IMPACT:</a:t>
+            </a:r>
+          </a:p>
+          <a:p>
+            <a:pPr>
+              <a:defRPr sz="1100">
+                <a:solidFill>
+                  <a:srgbClr val="94A3B8"/>
+                </a:solidFill>
+                <a:latin typeface="Segoe UI"/>
+              </a:defRPr>
+            </a:pPr>
+            <a:r>
+              <a:t>Prior claim denied for lack of conservative therapy. Agent located statutory hepatic transaminitis exemption in 45-page chart.</a:t>
+            </a:r>
+          </a:p>
+        </p:txBody>
+      </p:sp>
+      <p:sp>
+        <p:nvSpPr>
+          <p:cNvPr id="16" name="Rounded Rectangle 15"/>
+          <p:cNvSpPr/>
+          <p:nvPr/>
+        </p:nvSpPr>
+        <p:spPr>
+          <a:xfrm>
+            <a:off x="8129016" y="2926080"/>
+            <a:ext cx="3200400" cy="822960"/>
+          </a:xfrm>
+          <a:prstGeom prst="roundRect">
+            <a:avLst/>
+          </a:prstGeom>
+          <a:solidFill>
+            <a:srgbClr val="0F172A"/>
+          </a:solidFill>
+          <a:ln w="12700">
+            <a:solidFill>
+              <a:srgbClr val="06B6D4"/>
+            </a:solidFill>
+          </a:ln>
+        </p:spPr>
+        <p:style>
+          <a:lnRef idx="1">
+            <a:schemeClr val="accent1"/>
+          </a:lnRef>
+          <a:fillRef idx="3">
+            <a:schemeClr val="accent1"/>
+          </a:fillRef>
+          <a:effectRef idx="2">
+            <a:schemeClr val="accent1"/>
+          </a:effectRef>
+          <a:fontRef idx="minor">
+            <a:schemeClr val="lt1"/>
+          </a:fontRef>
+        </p:style>
+        <p:txBody>
+          <a:bodyPr rtlCol="0" anchor="ctr"/>
+          <a:lstStyle/>
+          <a:p>
+            <a:pPr algn="ctr"/>
+          </a:p>
+        </p:txBody>
+      </p:sp>
+      <p:sp>
+        <p:nvSpPr>
+          <p:cNvPr id="17" name="TextBox 16"/>
+          <p:cNvSpPr txBox="1"/>
+          <p:nvPr/>
+        </p:nvSpPr>
+        <p:spPr>
+          <a:xfrm>
+            <a:off x="8220456" y="2971800"/>
+            <a:ext cx="3017520" cy="731520"/>
+          </a:xfrm>
+          <a:prstGeom prst="rect">
+            <a:avLst/>
+          </a:prstGeom>
+          <a:noFill/>
+        </p:spPr>
+        <p:txBody>
+          <a:bodyPr wrap="square">
+            <a:spAutoFit/>
+          </a:bodyPr>
+          <a:lstStyle/>
+          <a:p>
+            <a:pPr>
+              <a:defRPr sz="1100" b="1">
                 <a:solidFill>
                   <a:srgbClr val="06B6D4"/>
                 </a:solidFill>
@@ -11291,15 +13164,12 @@
               </a:defRPr>
             </a:pPr>
             <a:r>
-              <a:t>Español (Spanish): </a:t>
-            </a:r>
-          </a:p>
-          <a:p>
-            <a:pPr>
-              <a:spcAft>
-                <a:spcPts val="800"/>
-              </a:spcAft>
-              <a:defRPr sz="1100">
+              <a:t>Confidence: 92% Overturn Score</a:t>
+            </a:r>
+          </a:p>
+          <a:p>
+            <a:pPr>
+              <a:defRPr sz="1000">
                 <a:solidFill>
                   <a:srgbClr val="94A3B8"/>
                 </a:solidFill>
@@ -11307,39 +13177,7 @@
               </a:defRPr>
             </a:pPr>
             <a:r>
-              <a:t>"¡Buenas noticias! Su cirugía de rodilla ha sido aprobada. Su médico demostró que completó 6 meses de fisioterapia y su resonancia confirmó un desgarro de menisco."</a:t>
-            </a:r>
-          </a:p>
-          <a:p>
-            <a:pPr>
-              <a:spcAft>
-                <a:spcPts val="200"/>
-              </a:spcAft>
-              <a:defRPr sz="1200" b="1">
-                <a:solidFill>
-                  <a:srgbClr val="06B6D4"/>
-                </a:solidFill>
-                <a:latin typeface="Segoe UI"/>
-              </a:defRPr>
-            </a:pPr>
-            <a:r>
-              <a:t>हिंदी (Hindi): </a:t>
-            </a:r>
-          </a:p>
-          <a:p>
-            <a:pPr>
-              <a:spcAft>
-                <a:spcPts val="800"/>
-              </a:spcAft>
-              <a:defRPr sz="1100">
-                <a:solidFill>
-                  <a:srgbClr val="94A3B8"/>
-                </a:solidFill>
-                <a:latin typeface="Segoe UI"/>
-              </a:defRPr>
-            </a:pPr>
-            <a:r>
-              <a:t>"अच्छी खबर! आपकी घुटने की सर्जरी स्वीकृत हो गई है। आपके डॉक्टर ने दिखाया कि आपने 6 महीने फिजियोथेरेपी पूरी की और एमआरआई में मेनिस्कस टियर की पुष्टि हुई।"</a:t>
+              <a:t>Execution Time: 18.1 Seconds on AMD MI300X</a:t>
             </a:r>
           </a:p>
         </p:txBody>
@@ -11436,7 +13274,7 @@
               </a:defRPr>
             </a:pPr>
             <a:r>
-              <a:t>AMD HARDWARE BENCHMARKS  •  TRACK 2: HEALTH &amp; WELLBEING | EVOLUS ON AMD</a:t>
+              <a:t>CLINICAL GOVERNANCE  •  TRACK 2: HEALTH &amp; WELLBEING | EVOLUS ON AMD</a:t>
             </a:r>
           </a:p>
         </p:txBody>
@@ -11472,7 +13310,7 @@
               </a:defRPr>
             </a:pPr>
             <a:r>
-              <a:t>AMD Instinct™ MI300X: Why Silicon Matters in Healthcare</a:t>
+              <a:t>Physician Oversight: 1-Click Sign-Off &amp; Transmit</a:t>
             </a:r>
           </a:p>
         </p:txBody>
@@ -11528,8 +13366,8 @@
         </p:nvSpPr>
         <p:spPr>
           <a:xfrm>
-            <a:off x="731520" y="1645920"/>
-            <a:ext cx="2560320" cy="2194560"/>
+            <a:off x="731520" y="1554480"/>
+            <a:ext cx="5266944" cy="4754880"/>
           </a:xfrm>
           <a:prstGeom prst="roundRect">
             <a:avLst/>
@@ -11573,8 +13411,8 @@
         </p:nvSpPr>
         <p:spPr>
           <a:xfrm>
-            <a:off x="868680" y="1737360"/>
-            <a:ext cx="2286000" cy="2011680"/>
+            <a:off x="1005840" y="1737360"/>
+            <a:ext cx="4718304" cy="4389120"/>
           </a:xfrm>
           <a:prstGeom prst="rect">
             <a:avLst/>
@@ -11589,25 +13427,25 @@
           <a:p>
             <a:pPr>
               <a:spcAft>
-                <a:spcPts val="200"/>
-              </a:spcAft>
-              <a:defRPr sz="2200" b="1">
-                <a:solidFill>
-                  <a:srgbClr val="ED1C24"/>
-                </a:solidFill>
-                <a:latin typeface="Segoe UI"/>
-              </a:defRPr>
-            </a:pPr>
-            <a:r>
-              <a:t>192 GB HBM3</a:t>
-            </a:r>
-          </a:p>
-          <a:p>
-            <a:pPr>
-              <a:spcAft>
                 <a:spcPts val="600"/>
               </a:spcAft>
-              <a:defRPr sz="1100" b="1">
+              <a:defRPr sz="1400" b="1">
+                <a:solidFill>
+                  <a:srgbClr val="06B6D4"/>
+                </a:solidFill>
+                <a:latin typeface="Segoe UI"/>
+              </a:defRPr>
+            </a:pPr>
+            <a:r>
+              <a:t>DOCTOR REVIEW QUEUE (DR. ARIS THORNE, MD)</a:t>
+            </a:r>
+          </a:p>
+          <a:p>
+            <a:pPr>
+              <a:spcAft>
+                <a:spcPts val="1400"/>
+              </a:spcAft>
+              <a:defRPr sz="1800" b="1">
                 <a:solidFill>
                   <a:srgbClr val="F8FAFC"/>
                 </a:solidFill>
@@ -11615,20 +13453,79 @@
               </a:defRPr>
             </a:pPr>
             <a:r>
-              <a:t>ZERO LOSSY CHUNKING</a:t>
-            </a:r>
-          </a:p>
-          <a:p>
-            <a:pPr>
-              <a:defRPr sz="1100">
+              <a:t>Zero Faxes, Zero Wait, 100% Medical Authority</a:t>
+            </a:r>
+          </a:p>
+          <a:p>
+            <a:pPr>
+              <a:spcAft>
+                <a:spcPts val="1000"/>
+              </a:spcAft>
+              <a:defRPr sz="1200" b="1">
+                <a:solidFill>
+                  <a:srgbClr val="14B8A6"/>
+                </a:solidFill>
+                <a:latin typeface="Segoe UI"/>
+              </a:defRPr>
+            </a:pPr>
+            <a:r>
+              <a:t>✔  Evidence Clause Inspection: </a:t>
+            </a:r>
+            <a:r>
+              <a:rPr b="0">
                 <a:solidFill>
                   <a:srgbClr val="94A3B8"/>
                 </a:solidFill>
-                <a:latin typeface="Segoe UI"/>
-              </a:defRPr>
-            </a:pPr>
-            <a:r>
-              <a:t>Allows holding entire 45-page patient records and 80-page payer manuals simultaneously in high-bandwidth memory.</a:t>
+              </a:rPr>
+              <a:t>The physician sees exact page numbers, radiology quotes, and physical therapy dates mapped to payer policy clauses.</a:t>
+            </a:r>
+          </a:p>
+          <a:p>
+            <a:pPr>
+              <a:spcAft>
+                <a:spcPts val="1000"/>
+              </a:spcAft>
+              <a:defRPr sz="1200" b="1">
+                <a:solidFill>
+                  <a:srgbClr val="14B8A6"/>
+                </a:solidFill>
+                <a:latin typeface="Segoe UI"/>
+              </a:defRPr>
+            </a:pPr>
+            <a:r>
+              <a:t>✔  Clinical Comment Override: </a:t>
+            </a:r>
+            <a:r>
+              <a:rPr b="0">
+                <a:solidFill>
+                  <a:srgbClr val="94A3B8"/>
+                </a:solidFill>
+              </a:rPr>
+              <a:t>Physicians can append specific surgical urgency notes or override policy caveats with clinical justification.</a:t>
+            </a:r>
+          </a:p>
+          <a:p>
+            <a:pPr>
+              <a:spcAft>
+                <a:spcPts val="1000"/>
+              </a:spcAft>
+              <a:defRPr sz="1200" b="1">
+                <a:solidFill>
+                  <a:srgbClr val="14B8A6"/>
+                </a:solidFill>
+                <a:latin typeface="Segoe UI"/>
+              </a:defRPr>
+            </a:pPr>
+            <a:r>
+              <a:t>✔  1-Click Cryptographic Sign: </a:t>
+            </a:r>
+            <a:r>
+              <a:rPr b="0">
+                <a:solidFill>
+                  <a:srgbClr val="94A3B8"/>
+                </a:solidFill>
+              </a:rPr>
+              <a:t>Generates an electronic signature conforming to 42 CFR § 495.4 and state electronic prescribing standards.</a:t>
             </a:r>
           </a:p>
         </p:txBody>
@@ -11641,8 +13538,8 @@
         </p:nvSpPr>
         <p:spPr>
           <a:xfrm>
-            <a:off x="3456432" y="1645920"/>
-            <a:ext cx="2560320" cy="2194560"/>
+            <a:off x="6190488" y="1554480"/>
+            <a:ext cx="5266944" cy="4754880"/>
           </a:xfrm>
           <a:prstGeom prst="roundRect">
             <a:avLst/>
@@ -11686,8 +13583,8 @@
         </p:nvSpPr>
         <p:spPr>
           <a:xfrm>
-            <a:off x="3593592" y="1737360"/>
-            <a:ext cx="2286000" cy="2011680"/>
+            <a:off x="6464808" y="1737360"/>
+            <a:ext cx="4718304" cy="4389120"/>
           </a:xfrm>
           <a:prstGeom prst="rect">
             <a:avLst/>
@@ -11702,25 +13599,25 @@
           <a:p>
             <a:pPr>
               <a:spcAft>
-                <a:spcPts val="200"/>
-              </a:spcAft>
-              <a:defRPr sz="2200" b="1">
-                <a:solidFill>
-                  <a:srgbClr val="06B6D4"/>
-                </a:solidFill>
-                <a:latin typeface="Segoe UI"/>
-              </a:defRPr>
-            </a:pPr>
-            <a:r>
-              <a:t>86.4 tok / sec</a:t>
-            </a:r>
-          </a:p>
-          <a:p>
-            <a:pPr>
-              <a:spcAft>
                 <a:spcPts val="600"/>
               </a:spcAft>
-              <a:defRPr sz="1100" b="1">
+              <a:defRPr sz="1400" b="1">
+                <a:solidFill>
+                  <a:srgbClr val="22C55E"/>
+                </a:solidFill>
+                <a:latin typeface="Segoe UI"/>
+              </a:defRPr>
+            </a:pPr>
+            <a:r>
+              <a:t>CLEARINGHOUSE TRANSMISSION &amp; AUDITING</a:t>
+            </a:r>
+          </a:p>
+          <a:p>
+            <a:pPr>
+              <a:spcAft>
+                <a:spcPts val="1400"/>
+              </a:spcAft>
+              <a:defRPr sz="1800" b="1">
                 <a:solidFill>
                   <a:srgbClr val="F8FAFC"/>
                 </a:solidFill>
@@ -11728,209 +13625,63 @@
               </a:defRPr>
             </a:pPr>
             <a:r>
-              <a:t>SUSTAINED INFERENCE</a:t>
-            </a:r>
-          </a:p>
-          <a:p>
-            <a:pPr>
-              <a:defRPr sz="1100">
+              <a:t>Instant Electronic Payer Submission</a:t>
+            </a:r>
+          </a:p>
+          <a:p>
+            <a:pPr>
+              <a:spcAft>
+                <a:spcPts val="1000"/>
+              </a:spcAft>
+              <a:defRPr sz="1200" b="1">
+                <a:solidFill>
+                  <a:srgbClr val="22C55E"/>
+                </a:solidFill>
+                <a:latin typeface="Segoe UI"/>
+              </a:defRPr>
+            </a:pPr>
+            <a:r>
+              <a:t>⚡  Direct EDI 278 Packet Creation: </a:t>
+            </a:r>
+            <a:r>
+              <a:rPr b="0">
                 <a:solidFill>
                   <a:srgbClr val="94A3B8"/>
                 </a:solidFill>
-                <a:latin typeface="Segoe UI"/>
-              </a:defRPr>
-            </a:pPr>
-            <a:r>
-              <a:t>High-throughput token generation allows multi-agent cross-referencing in under 12 seconds per case.</a:t>
-            </a:r>
-          </a:p>
-        </p:txBody>
-      </p:sp>
-      <p:sp>
-        <p:nvSpPr>
-          <p:cNvPr id="10" name="Rounded Rectangle 9"/>
-          <p:cNvSpPr/>
-          <p:nvPr/>
-        </p:nvSpPr>
-        <p:spPr>
-          <a:xfrm>
-            <a:off x="6181344" y="1645920"/>
-            <a:ext cx="2560320" cy="2194560"/>
-          </a:xfrm>
-          <a:prstGeom prst="roundRect">
-            <a:avLst/>
-          </a:prstGeom>
-          <a:solidFill>
-            <a:srgbClr val="1E293B"/>
-          </a:solidFill>
-          <a:ln w="15240">
-            <a:solidFill>
-              <a:srgbClr val="334155"/>
-            </a:solidFill>
-          </a:ln>
-        </p:spPr>
-        <p:style>
-          <a:lnRef idx="1">
-            <a:schemeClr val="accent1"/>
-          </a:lnRef>
-          <a:fillRef idx="3">
-            <a:schemeClr val="accent1"/>
-          </a:fillRef>
-          <a:effectRef idx="2">
-            <a:schemeClr val="accent1"/>
-          </a:effectRef>
-          <a:fontRef idx="minor">
-            <a:schemeClr val="lt1"/>
-          </a:fontRef>
-        </p:style>
-        <p:txBody>
-          <a:bodyPr rtlCol="0" anchor="ctr"/>
-          <a:lstStyle/>
-          <a:p>
-            <a:pPr algn="ctr"/>
-          </a:p>
-        </p:txBody>
-      </p:sp>
-      <p:sp>
-        <p:nvSpPr>
-          <p:cNvPr id="11" name="TextBox 10"/>
-          <p:cNvSpPr txBox="1"/>
-          <p:nvPr/>
-        </p:nvSpPr>
-        <p:spPr>
-          <a:xfrm>
-            <a:off x="6318504" y="1737360"/>
-            <a:ext cx="2286000" cy="2011680"/>
-          </a:xfrm>
-          <a:prstGeom prst="rect">
-            <a:avLst/>
-          </a:prstGeom>
-          <a:noFill/>
-        </p:spPr>
-        <p:txBody>
-          <a:bodyPr wrap="square">
-            <a:spAutoFit/>
-          </a:bodyPr>
-          <a:lstStyle/>
-          <a:p>
-            <a:pPr>
-              <a:spcAft>
-                <a:spcPts val="200"/>
-              </a:spcAft>
-              <a:defRPr sz="2200" b="1">
-                <a:solidFill>
-                  <a:srgbClr val="14B8A6"/>
-                </a:solidFill>
-                <a:latin typeface="Segoe UI"/>
-              </a:defRPr>
-            </a:pPr>
-            <a:r>
-              <a:t>192 ms TTFT</a:t>
-            </a:r>
-          </a:p>
-          <a:p>
-            <a:pPr>
-              <a:spcAft>
-                <a:spcPts val="600"/>
-              </a:spcAft>
-              <a:defRPr sz="1100" b="1">
-                <a:solidFill>
-                  <a:srgbClr val="F8FAFC"/>
-                </a:solidFill>
-                <a:latin typeface="Segoe UI"/>
-              </a:defRPr>
-            </a:pPr>
-            <a:r>
-              <a:t>TIME-TO-FIRST-TOKEN</a:t>
-            </a:r>
-          </a:p>
-          <a:p>
-            <a:pPr>
-              <a:defRPr sz="1100">
+              </a:rPr>
+              <a:t>Converts clinical notes into formal ANSI X12 278 healthcare services review transactions.</a:t>
+            </a:r>
+          </a:p>
+          <a:p>
+            <a:pPr>
+              <a:spcAft>
+                <a:spcPts val="1000"/>
+              </a:spcAft>
+              <a:defRPr sz="1200" b="1">
+                <a:solidFill>
+                  <a:srgbClr val="22C55E"/>
+                </a:solidFill>
+                <a:latin typeface="Segoe UI"/>
+              </a:defRPr>
+            </a:pPr>
+            <a:r>
+              <a:t>⚡  Immutable Ledger Logging: </a:t>
+            </a:r>
+            <a:r>
+              <a:rPr b="0">
                 <a:solidFill>
                   <a:srgbClr val="94A3B8"/>
                 </a:solidFill>
-                <a:latin typeface="Segoe UI"/>
-              </a:defRPr>
-            </a:pPr>
-            <a:r>
-              <a:t>Instantaneous clinical responsiveness, enabling interactive doctor review without UI freezing.</a:t>
-            </a:r>
-          </a:p>
-        </p:txBody>
-      </p:sp>
-      <p:sp>
-        <p:nvSpPr>
-          <p:cNvPr id="12" name="Rounded Rectangle 11"/>
-          <p:cNvSpPr/>
-          <p:nvPr/>
-        </p:nvSpPr>
-        <p:spPr>
-          <a:xfrm>
-            <a:off x="8906256" y="1645920"/>
-            <a:ext cx="2560320" cy="2194560"/>
-          </a:xfrm>
-          <a:prstGeom prst="roundRect">
-            <a:avLst/>
-          </a:prstGeom>
-          <a:solidFill>
-            <a:srgbClr val="1E293B"/>
-          </a:solidFill>
-          <a:ln w="15240">
-            <a:solidFill>
-              <a:srgbClr val="334155"/>
-            </a:solidFill>
-          </a:ln>
-        </p:spPr>
-        <p:style>
-          <a:lnRef idx="1">
-            <a:schemeClr val="accent1"/>
-          </a:lnRef>
-          <a:fillRef idx="3">
-            <a:schemeClr val="accent1"/>
-          </a:fillRef>
-          <a:effectRef idx="2">
-            <a:schemeClr val="accent1"/>
-          </a:effectRef>
-          <a:fontRef idx="minor">
-            <a:schemeClr val="lt1"/>
-          </a:fontRef>
-        </p:style>
-        <p:txBody>
-          <a:bodyPr rtlCol="0" anchor="ctr"/>
-          <a:lstStyle/>
-          <a:p>
-            <a:pPr algn="ctr"/>
-          </a:p>
-        </p:txBody>
-      </p:sp>
-      <p:sp>
-        <p:nvSpPr>
-          <p:cNvPr id="13" name="TextBox 12"/>
-          <p:cNvSpPr txBox="1"/>
-          <p:nvPr/>
-        </p:nvSpPr>
-        <p:spPr>
-          <a:xfrm>
-            <a:off x="9043416" y="1737360"/>
-            <a:ext cx="2286000" cy="2011680"/>
-          </a:xfrm>
-          <a:prstGeom prst="rect">
-            <a:avLst/>
-          </a:prstGeom>
-          <a:noFill/>
-        </p:spPr>
-        <p:txBody>
-          <a:bodyPr wrap="square">
-            <a:spAutoFit/>
-          </a:bodyPr>
-          <a:lstStyle/>
-          <a:p>
-            <a:pPr>
-              <a:spcAft>
-                <a:spcPts val="200"/>
-              </a:spcAft>
-              <a:defRPr sz="2200" b="1">
+              </a:rPr>
+              <a:t>Every agent prompt, confidence calculation, hardware telemetry snapshot, and human approval is timestamped.</a:t>
+            </a:r>
+          </a:p>
+          <a:p>
+            <a:pPr>
+              <a:spcAft>
+                <a:spcPts val="1000"/>
+              </a:spcAft>
+              <a:defRPr sz="1200" b="1">
                 <a:solidFill>
                   <a:srgbClr val="22C55E"/>
                 </a:solidFill>
@@ -11938,192 +13689,15 @@
               </a:defRPr>
             </a:pPr>
             <a:r>
-              <a:t>100% On-Prem</a:t>
-            </a:r>
-          </a:p>
-          <a:p>
-            <a:pPr>
-              <a:spcAft>
-                <a:spcPts val="600"/>
-              </a:spcAft>
-              <a:defRPr sz="1100" b="1">
-                <a:solidFill>
-                  <a:srgbClr val="F8FAFC"/>
-                </a:solidFill>
-                <a:latin typeface="Segoe UI"/>
-              </a:defRPr>
-            </a:pPr>
-            <a:r>
-              <a:t>HIPAA COMPLIANT</a:t>
-            </a:r>
-          </a:p>
-          <a:p>
-            <a:pPr>
-              <a:defRPr sz="1100">
+              <a:t>⚡  Audit-Proof Traceability: </a:t>
+            </a:r>
+            <a:r>
+              <a:rPr b="0">
                 <a:solidFill>
                   <a:srgbClr val="94A3B8"/>
                 </a:solidFill>
-                <a:latin typeface="Segoe UI"/>
-              </a:defRPr>
-            </a:pPr>
-            <a:r>
-              <a:t>Guaranteed local hardware boundary prevents patient health data from ever touching third-party clouds.</a:t>
-            </a:r>
-          </a:p>
-        </p:txBody>
-      </p:sp>
-      <p:sp>
-        <p:nvSpPr>
-          <p:cNvPr id="14" name="Rounded Rectangle 13"/>
-          <p:cNvSpPr/>
-          <p:nvPr/>
-        </p:nvSpPr>
-        <p:spPr>
-          <a:xfrm>
-            <a:off x="731520" y="4114800"/>
-            <a:ext cx="10728655" cy="2194560"/>
-          </a:xfrm>
-          <a:prstGeom prst="roundRect">
-            <a:avLst/>
-          </a:prstGeom>
-          <a:solidFill>
-            <a:srgbClr val="1E293B"/>
-          </a:solidFill>
-          <a:ln w="15240">
-            <a:solidFill>
-              <a:srgbClr val="334155"/>
-            </a:solidFill>
-          </a:ln>
-        </p:spPr>
-        <p:style>
-          <a:lnRef idx="1">
-            <a:schemeClr val="accent1"/>
-          </a:lnRef>
-          <a:fillRef idx="3">
-            <a:schemeClr val="accent1"/>
-          </a:fillRef>
-          <a:effectRef idx="2">
-            <a:schemeClr val="accent1"/>
-          </a:effectRef>
-          <a:fontRef idx="minor">
-            <a:schemeClr val="lt1"/>
-          </a:fontRef>
-        </p:style>
-        <p:txBody>
-          <a:bodyPr rtlCol="0" anchor="ctr"/>
-          <a:lstStyle/>
-          <a:p>
-            <a:pPr algn="ctr"/>
-          </a:p>
-        </p:txBody>
-      </p:sp>
-      <p:sp>
-        <p:nvSpPr>
-          <p:cNvPr id="15" name="TextBox 14"/>
-          <p:cNvSpPr txBox="1"/>
-          <p:nvPr/>
-        </p:nvSpPr>
-        <p:spPr>
-          <a:xfrm>
-            <a:off x="1005840" y="4206240"/>
-            <a:ext cx="10149840" cy="2011680"/>
-          </a:xfrm>
-          <a:prstGeom prst="rect">
-            <a:avLst/>
-          </a:prstGeom>
-          <a:noFill/>
-        </p:spPr>
-        <p:txBody>
-          <a:bodyPr wrap="square">
-            <a:spAutoFit/>
-          </a:bodyPr>
-          <a:lstStyle/>
-          <a:p>
-            <a:pPr>
-              <a:spcAft>
-                <a:spcPts val="800"/>
-              </a:spcAft>
-              <a:defRPr sz="1200" b="1">
-                <a:solidFill>
-                  <a:srgbClr val="06B6D4"/>
-                </a:solidFill>
-                <a:latin typeface="Segoe UI"/>
-              </a:defRPr>
-            </a:pPr>
-            <a:r>
-              <a:t>ROCm SOFTWARE STACK &amp; DEPLOYMENT ARCHITECTURE</a:t>
-            </a:r>
-          </a:p>
-          <a:p>
-            <a:pPr>
-              <a:spcAft>
-                <a:spcPts val="600"/>
-              </a:spcAft>
-              <a:defRPr sz="1300" b="1">
-                <a:solidFill>
-                  <a:srgbClr val="F8FAFC"/>
-                </a:solidFill>
-                <a:latin typeface="Segoe UI"/>
-              </a:defRPr>
-            </a:pPr>
-            <a:r>
-              <a:t>•  vLLM on ROCm 6.2: </a:t>
-            </a:r>
-            <a:r>
-              <a:rPr b="0">
-                <a:solidFill>
-                  <a:srgbClr val="94A3B8"/>
-                </a:solidFill>
               </a:rPr>
-              <a:t>Leverages PagedAttention and FlashAttention-2 optimized for AMD CDNA 3 matrix cores.</a:t>
-            </a:r>
-          </a:p>
-          <a:p>
-            <a:pPr>
-              <a:spcAft>
-                <a:spcPts val="600"/>
-              </a:spcAft>
-              <a:defRPr sz="1300" b="1">
-                <a:solidFill>
-                  <a:srgbClr val="F8FAFC"/>
-                </a:solidFill>
-                <a:latin typeface="Segoe UI"/>
-              </a:defRPr>
-            </a:pPr>
-            <a:r>
-              <a:t>•  Dynamic Model Selection: </a:t>
-            </a:r>
-            <a:r>
-              <a:rPr b="0">
-                <a:solidFill>
-                  <a:srgbClr val="94A3B8"/>
-                </a:solidFill>
-              </a:rPr>
-              <a:t>Lightweight Llama-3.1-8B for instant entity extraction; Qwen-2.5-14B/70B for multi-clause clinical reasoning and appeal drafting.</a:t>
-            </a:r>
-          </a:p>
-          <a:p>
-            <a:pPr>
-              <a:spcAft>
-                <a:spcPts val="600"/>
-              </a:spcAft>
-              <a:defRPr sz="1300" b="1">
-                <a:solidFill>
-                  <a:srgbClr val="F8FAFC"/>
-                </a:solidFill>
-                <a:latin typeface="Segoe UI"/>
-              </a:defRPr>
-            </a:pPr>
-            <a:r>
-              <a:t>•  Production Telemetry HUD: </a:t>
-            </a:r>
-            <a:r>
-              <a:rPr b="0">
-                <a:solidFill>
-                  <a:srgbClr val="94A3B8"/>
-                </a:solidFill>
-              </a:rPr>
-              <a:t>Real-time monitoring of GPU VRAM utilization (14.8/192 GB), generation speed, and prompt latency embedded in the clinical portal.</a:t>
+              <a:t>Hospital compliance officers can replay any prior-auth decision years later with complete proof.</a:t>
             </a:r>
           </a:p>
         </p:txBody>
